--- a/demo-outputs/generated_deck.pptx
+++ b/demo-outputs/generated_deck.pptx
@@ -27,9 +27,14 @@
     <p:sldId id="275" r:id="rId21"/>
     <p:sldId id="276" r:id="rId22"/>
     <p:sldId id="277" r:id="rId23"/>
+    <p:sldId id="278" r:id="rId24"/>
+    <p:sldId id="279" r:id="rId25"/>
+    <p:sldId id="280" r:id="rId26"/>
+    <p:sldId id="281" r:id="rId27"/>
+    <p:sldId id="282" r:id="rId28"/>
   </p:sldIdLst>
   <p:notesMasterIdLst>
-    <p:notesMasterId r:id="rId24"/>
+    <p:notesMasterId r:id="rId29"/>
   </p:notesMasterIdLst>
   <p:sldSz cx="12192000" cy="6858000"/>
   <p:notesSz cx="6858000" cy="12192000"/>
@@ -1755,7 +1760,7 @@
           <a:p>
             <a:r>
               <a:rPr lang="en-US" dirty="0"/>
-              <a:t>Use this slide to acknowledge source material and technical references used in the deck.</a:t>
+              <a:t/>
             </a:r>
             <a:endParaRPr lang="en-US" dirty="0"/>
           </a:p>
@@ -1779,6 +1784,446 @@
             <a:fld id="{F7021451-1387-4CA6-816F-3879F97B5CBC}" type="slidenum">
               <a:rPr lang="en-US"/>
               <a:t>22</a:t>
+            </a:fld>
+            <a:endParaRPr lang="en-US"/>
+          </a:p>
+        </p:txBody>
+      </p:sp>
+    </p:spTree>
+    <p:extLst>
+      <p:ext uri="{BB962C8B-B14F-4D97-AF65-F5344CB8AC3E}">
+        <p14:creationId xmlns:p14="http://schemas.microsoft.com/office/powerpoint/2010/main" val="1024086991"/>
+      </p:ext>
+    </p:extLst>
+  </p:cSld>
+  <p:clrMapOvr>
+    <a:masterClrMapping/>
+  </p:clrMapOvr>
+</p:notes>
+</file>
+
+<file path=ppt/notesSlides/notesSlide23.xml><?xml version="1.0" encoding="utf-8"?>
+<p:notes xmlns:a="http://schemas.openxmlformats.org/drawingml/2006/main" xmlns:r="http://schemas.openxmlformats.org/officeDocument/2006/relationships" xmlns:p="http://schemas.openxmlformats.org/presentationml/2006/main">
+  <p:cSld>
+    <p:spTree>
+      <p:nvGrpSpPr>
+        <p:cNvPr id="1" name=""/>
+        <p:cNvGrpSpPr/>
+        <p:nvPr/>
+      </p:nvGrpSpPr>
+      <p:grpSpPr>
+        <a:xfrm>
+          <a:off x="0" y="0"/>
+          <a:ext cx="0" cy="0"/>
+          <a:chOff x="0" y="0"/>
+          <a:chExt cx="0" cy="0"/>
+        </a:xfrm>
+      </p:grpSpPr>
+      <p:sp>
+        <p:nvSpPr>
+          <p:cNvPr id="2" name="Slide Image Placeholder 1"/>
+          <p:cNvSpPr>
+            <a:spLocks noGrp="1" noRot="1" noChangeAspect="1"/>
+          </p:cNvSpPr>
+          <p:nvPr>
+            <p:ph type="sldImg"/>
+          </p:nvPr>
+        </p:nvSpPr>
+        <p:spPr/>
+      </p:sp>
+      <p:sp>
+        <p:nvSpPr>
+          <p:cNvPr id="3" name="Notes Placeholder 2"/>
+          <p:cNvSpPr>
+            <a:spLocks noGrp="1"/>
+          </p:cNvSpPr>
+          <p:nvPr>
+            <p:ph type="body" idx="1"/>
+          </p:nvPr>
+        </p:nvSpPr>
+        <p:spPr/>
+        <p:txBody>
+          <a:bodyPr/>
+          <a:lstStyle/>
+          <a:p>
+            <a:r>
+              <a:rPr lang="en-US" dirty="0"/>
+              <a:t/>
+            </a:r>
+            <a:endParaRPr lang="en-US" dirty="0"/>
+          </a:p>
+        </p:txBody>
+      </p:sp>
+      <p:sp>
+        <p:nvSpPr>
+          <p:cNvPr id="4" name="Slide Number Placeholder 3"/>
+          <p:cNvSpPr>
+            <a:spLocks noGrp="1"/>
+          </p:cNvSpPr>
+          <p:nvPr>
+            <p:ph type="sldNum" sz="quarter" idx="10"/>
+          </p:nvPr>
+        </p:nvSpPr>
+        <p:spPr/>
+        <p:txBody>
+          <a:bodyPr/>
+          <a:lstStyle/>
+          <a:p>
+            <a:fld id="{F7021451-1387-4CA6-816F-3879F97B5CBC}" type="slidenum">
+              <a:rPr lang="en-US"/>
+              <a:t>23</a:t>
+            </a:fld>
+            <a:endParaRPr lang="en-US"/>
+          </a:p>
+        </p:txBody>
+      </p:sp>
+    </p:spTree>
+    <p:extLst>
+      <p:ext uri="{BB962C8B-B14F-4D97-AF65-F5344CB8AC3E}">
+        <p14:creationId xmlns:p14="http://schemas.microsoft.com/office/powerpoint/2010/main" val="1024086991"/>
+      </p:ext>
+    </p:extLst>
+  </p:cSld>
+  <p:clrMapOvr>
+    <a:masterClrMapping/>
+  </p:clrMapOvr>
+</p:notes>
+</file>
+
+<file path=ppt/notesSlides/notesSlide24.xml><?xml version="1.0" encoding="utf-8"?>
+<p:notes xmlns:a="http://schemas.openxmlformats.org/drawingml/2006/main" xmlns:r="http://schemas.openxmlformats.org/officeDocument/2006/relationships" xmlns:p="http://schemas.openxmlformats.org/presentationml/2006/main">
+  <p:cSld>
+    <p:spTree>
+      <p:nvGrpSpPr>
+        <p:cNvPr id="1" name=""/>
+        <p:cNvGrpSpPr/>
+        <p:nvPr/>
+      </p:nvGrpSpPr>
+      <p:grpSpPr>
+        <a:xfrm>
+          <a:off x="0" y="0"/>
+          <a:ext cx="0" cy="0"/>
+          <a:chOff x="0" y="0"/>
+          <a:chExt cx="0" cy="0"/>
+        </a:xfrm>
+      </p:grpSpPr>
+      <p:sp>
+        <p:nvSpPr>
+          <p:cNvPr id="2" name="Slide Image Placeholder 1"/>
+          <p:cNvSpPr>
+            <a:spLocks noGrp="1" noRot="1" noChangeAspect="1"/>
+          </p:cNvSpPr>
+          <p:nvPr>
+            <p:ph type="sldImg"/>
+          </p:nvPr>
+        </p:nvSpPr>
+        <p:spPr/>
+      </p:sp>
+      <p:sp>
+        <p:nvSpPr>
+          <p:cNvPr id="3" name="Notes Placeholder 2"/>
+          <p:cNvSpPr>
+            <a:spLocks noGrp="1"/>
+          </p:cNvSpPr>
+          <p:nvPr>
+            <p:ph type="body" idx="1"/>
+          </p:nvPr>
+        </p:nvSpPr>
+        <p:spPr/>
+        <p:txBody>
+          <a:bodyPr/>
+          <a:lstStyle/>
+          <a:p>
+            <a:r>
+              <a:rPr lang="en-US" dirty="0"/>
+              <a:t/>
+            </a:r>
+            <a:endParaRPr lang="en-US" dirty="0"/>
+          </a:p>
+        </p:txBody>
+      </p:sp>
+      <p:sp>
+        <p:nvSpPr>
+          <p:cNvPr id="4" name="Slide Number Placeholder 3"/>
+          <p:cNvSpPr>
+            <a:spLocks noGrp="1"/>
+          </p:cNvSpPr>
+          <p:nvPr>
+            <p:ph type="sldNum" sz="quarter" idx="10"/>
+          </p:nvPr>
+        </p:nvSpPr>
+        <p:spPr/>
+        <p:txBody>
+          <a:bodyPr/>
+          <a:lstStyle/>
+          <a:p>
+            <a:fld id="{F7021451-1387-4CA6-816F-3879F97B5CBC}" type="slidenum">
+              <a:rPr lang="en-US"/>
+              <a:t>24</a:t>
+            </a:fld>
+            <a:endParaRPr lang="en-US"/>
+          </a:p>
+        </p:txBody>
+      </p:sp>
+    </p:spTree>
+    <p:extLst>
+      <p:ext uri="{BB962C8B-B14F-4D97-AF65-F5344CB8AC3E}">
+        <p14:creationId xmlns:p14="http://schemas.microsoft.com/office/powerpoint/2010/main" val="1024086991"/>
+      </p:ext>
+    </p:extLst>
+  </p:cSld>
+  <p:clrMapOvr>
+    <a:masterClrMapping/>
+  </p:clrMapOvr>
+</p:notes>
+</file>
+
+<file path=ppt/notesSlides/notesSlide25.xml><?xml version="1.0" encoding="utf-8"?>
+<p:notes xmlns:a="http://schemas.openxmlformats.org/drawingml/2006/main" xmlns:r="http://schemas.openxmlformats.org/officeDocument/2006/relationships" xmlns:p="http://schemas.openxmlformats.org/presentationml/2006/main">
+  <p:cSld>
+    <p:spTree>
+      <p:nvGrpSpPr>
+        <p:cNvPr id="1" name=""/>
+        <p:cNvGrpSpPr/>
+        <p:nvPr/>
+      </p:nvGrpSpPr>
+      <p:grpSpPr>
+        <a:xfrm>
+          <a:off x="0" y="0"/>
+          <a:ext cx="0" cy="0"/>
+          <a:chOff x="0" y="0"/>
+          <a:chExt cx="0" cy="0"/>
+        </a:xfrm>
+      </p:grpSpPr>
+      <p:sp>
+        <p:nvSpPr>
+          <p:cNvPr id="2" name="Slide Image Placeholder 1"/>
+          <p:cNvSpPr>
+            <a:spLocks noGrp="1" noRot="1" noChangeAspect="1"/>
+          </p:cNvSpPr>
+          <p:nvPr>
+            <p:ph type="sldImg"/>
+          </p:nvPr>
+        </p:nvSpPr>
+        <p:spPr/>
+      </p:sp>
+      <p:sp>
+        <p:nvSpPr>
+          <p:cNvPr id="3" name="Notes Placeholder 2"/>
+          <p:cNvSpPr>
+            <a:spLocks noGrp="1"/>
+          </p:cNvSpPr>
+          <p:nvPr>
+            <p:ph type="body" idx="1"/>
+          </p:nvPr>
+        </p:nvSpPr>
+        <p:spPr/>
+        <p:txBody>
+          <a:bodyPr/>
+          <a:lstStyle/>
+          <a:p>
+            <a:r>
+              <a:rPr lang="en-US" dirty="0"/>
+              <a:t/>
+            </a:r>
+            <a:endParaRPr lang="en-US" dirty="0"/>
+          </a:p>
+        </p:txBody>
+      </p:sp>
+      <p:sp>
+        <p:nvSpPr>
+          <p:cNvPr id="4" name="Slide Number Placeholder 3"/>
+          <p:cNvSpPr>
+            <a:spLocks noGrp="1"/>
+          </p:cNvSpPr>
+          <p:nvPr>
+            <p:ph type="sldNum" sz="quarter" idx="10"/>
+          </p:nvPr>
+        </p:nvSpPr>
+        <p:spPr/>
+        <p:txBody>
+          <a:bodyPr/>
+          <a:lstStyle/>
+          <a:p>
+            <a:fld id="{F7021451-1387-4CA6-816F-3879F97B5CBC}" type="slidenum">
+              <a:rPr lang="en-US"/>
+              <a:t>25</a:t>
+            </a:fld>
+            <a:endParaRPr lang="en-US"/>
+          </a:p>
+        </p:txBody>
+      </p:sp>
+    </p:spTree>
+    <p:extLst>
+      <p:ext uri="{BB962C8B-B14F-4D97-AF65-F5344CB8AC3E}">
+        <p14:creationId xmlns:p14="http://schemas.microsoft.com/office/powerpoint/2010/main" val="1024086991"/>
+      </p:ext>
+    </p:extLst>
+  </p:cSld>
+  <p:clrMapOvr>
+    <a:masterClrMapping/>
+  </p:clrMapOvr>
+</p:notes>
+</file>
+
+<file path=ppt/notesSlides/notesSlide26.xml><?xml version="1.0" encoding="utf-8"?>
+<p:notes xmlns:a="http://schemas.openxmlformats.org/drawingml/2006/main" xmlns:r="http://schemas.openxmlformats.org/officeDocument/2006/relationships" xmlns:p="http://schemas.openxmlformats.org/presentationml/2006/main">
+  <p:cSld>
+    <p:spTree>
+      <p:nvGrpSpPr>
+        <p:cNvPr id="1" name=""/>
+        <p:cNvGrpSpPr/>
+        <p:nvPr/>
+      </p:nvGrpSpPr>
+      <p:grpSpPr>
+        <a:xfrm>
+          <a:off x="0" y="0"/>
+          <a:ext cx="0" cy="0"/>
+          <a:chOff x="0" y="0"/>
+          <a:chExt cx="0" cy="0"/>
+        </a:xfrm>
+      </p:grpSpPr>
+      <p:sp>
+        <p:nvSpPr>
+          <p:cNvPr id="2" name="Slide Image Placeholder 1"/>
+          <p:cNvSpPr>
+            <a:spLocks noGrp="1" noRot="1" noChangeAspect="1"/>
+          </p:cNvSpPr>
+          <p:nvPr>
+            <p:ph type="sldImg"/>
+          </p:nvPr>
+        </p:nvSpPr>
+        <p:spPr/>
+      </p:sp>
+      <p:sp>
+        <p:nvSpPr>
+          <p:cNvPr id="3" name="Notes Placeholder 2"/>
+          <p:cNvSpPr>
+            <a:spLocks noGrp="1"/>
+          </p:cNvSpPr>
+          <p:nvPr>
+            <p:ph type="body" idx="1"/>
+          </p:nvPr>
+        </p:nvSpPr>
+        <p:spPr/>
+        <p:txBody>
+          <a:bodyPr/>
+          <a:lstStyle/>
+          <a:p>
+            <a:r>
+              <a:rPr lang="en-US" dirty="0"/>
+              <a:t/>
+            </a:r>
+            <a:endParaRPr lang="en-US" dirty="0"/>
+          </a:p>
+        </p:txBody>
+      </p:sp>
+      <p:sp>
+        <p:nvSpPr>
+          <p:cNvPr id="4" name="Slide Number Placeholder 3"/>
+          <p:cNvSpPr>
+            <a:spLocks noGrp="1"/>
+          </p:cNvSpPr>
+          <p:nvPr>
+            <p:ph type="sldNum" sz="quarter" idx="10"/>
+          </p:nvPr>
+        </p:nvSpPr>
+        <p:spPr/>
+        <p:txBody>
+          <a:bodyPr/>
+          <a:lstStyle/>
+          <a:p>
+            <a:fld id="{F7021451-1387-4CA6-816F-3879F97B5CBC}" type="slidenum">
+              <a:rPr lang="en-US"/>
+              <a:t>26</a:t>
+            </a:fld>
+            <a:endParaRPr lang="en-US"/>
+          </a:p>
+        </p:txBody>
+      </p:sp>
+    </p:spTree>
+    <p:extLst>
+      <p:ext uri="{BB962C8B-B14F-4D97-AF65-F5344CB8AC3E}">
+        <p14:creationId xmlns:p14="http://schemas.microsoft.com/office/powerpoint/2010/main" val="1024086991"/>
+      </p:ext>
+    </p:extLst>
+  </p:cSld>
+  <p:clrMapOvr>
+    <a:masterClrMapping/>
+  </p:clrMapOvr>
+</p:notes>
+</file>
+
+<file path=ppt/notesSlides/notesSlide27.xml><?xml version="1.0" encoding="utf-8"?>
+<p:notes xmlns:a="http://schemas.openxmlformats.org/drawingml/2006/main" xmlns:r="http://schemas.openxmlformats.org/officeDocument/2006/relationships" xmlns:p="http://schemas.openxmlformats.org/presentationml/2006/main">
+  <p:cSld>
+    <p:spTree>
+      <p:nvGrpSpPr>
+        <p:cNvPr id="1" name=""/>
+        <p:cNvGrpSpPr/>
+        <p:nvPr/>
+      </p:nvGrpSpPr>
+      <p:grpSpPr>
+        <a:xfrm>
+          <a:off x="0" y="0"/>
+          <a:ext cx="0" cy="0"/>
+          <a:chOff x="0" y="0"/>
+          <a:chExt cx="0" cy="0"/>
+        </a:xfrm>
+      </p:grpSpPr>
+      <p:sp>
+        <p:nvSpPr>
+          <p:cNvPr id="2" name="Slide Image Placeholder 1"/>
+          <p:cNvSpPr>
+            <a:spLocks noGrp="1" noRot="1" noChangeAspect="1"/>
+          </p:cNvSpPr>
+          <p:nvPr>
+            <p:ph type="sldImg"/>
+          </p:nvPr>
+        </p:nvSpPr>
+        <p:spPr/>
+      </p:sp>
+      <p:sp>
+        <p:nvSpPr>
+          <p:cNvPr id="3" name="Notes Placeholder 2"/>
+          <p:cNvSpPr>
+            <a:spLocks noGrp="1"/>
+          </p:cNvSpPr>
+          <p:nvPr>
+            <p:ph type="body" idx="1"/>
+          </p:nvPr>
+        </p:nvSpPr>
+        <p:spPr/>
+        <p:txBody>
+          <a:bodyPr/>
+          <a:lstStyle/>
+          <a:p>
+            <a:r>
+              <a:rPr lang="en-US" dirty="0"/>
+              <a:t>Use this slide to acknowledge source material and technical references used in the deck.</a:t>
+            </a:r>
+            <a:endParaRPr lang="en-US" dirty="0"/>
+          </a:p>
+        </p:txBody>
+      </p:sp>
+      <p:sp>
+        <p:nvSpPr>
+          <p:cNvPr id="4" name="Slide Number Placeholder 3"/>
+          <p:cNvSpPr>
+            <a:spLocks noGrp="1"/>
+          </p:cNvSpPr>
+          <p:nvPr>
+            <p:ph type="sldNum" sz="quarter" idx="10"/>
+          </p:nvPr>
+        </p:nvSpPr>
+        <p:spPr/>
+        <p:txBody>
+          <a:bodyPr/>
+          <a:lstStyle/>
+          <a:p>
+            <a:fld id="{F7021451-1387-4CA6-816F-3879F97B5CBC}" type="slidenum">
+              <a:rPr lang="en-US"/>
+              <a:t>27</a:t>
             </a:fld>
             <a:endParaRPr lang="en-US"/>
           </a:p>
@@ -15152,6 +15597,374 @@
     <p:bg>
       <p:bgPr>
         <a:solidFill>
+          <a:srgbClr val="172033"/>
+        </a:solidFill>
+      </p:bgPr>
+    </p:bg>
+    <p:spTree>
+      <p:nvGrpSpPr>
+        <p:cNvPr id="1" name=""/>
+        <p:cNvGrpSpPr/>
+        <p:nvPr/>
+      </p:nvGrpSpPr>
+      <p:grpSpPr>
+        <a:xfrm>
+          <a:off x="0" y="0"/>
+          <a:ext cx="0" cy="0"/>
+          <a:chOff x="0" y="0"/>
+          <a:chExt cx="0" cy="0"/>
+        </a:xfrm>
+      </p:grpSpPr>
+      <p:sp>
+        <p:nvSpPr>
+          <p:cNvPr id="2" name="Shape 0"/>
+          <p:cNvSpPr/>
+          <p:nvPr/>
+        </p:nvSpPr>
+        <p:spPr>
+          <a:xfrm>
+            <a:off x="0" y="0"/>
+            <a:ext cx="12191695" cy="6858000"/>
+          </a:xfrm>
+          <a:prstGeom prst="rect">
+            <a:avLst/>
+          </a:prstGeom>
+          <a:solidFill>
+            <a:srgbClr val="172033"/>
+          </a:solidFill>
+          <a:ln w="12700">
+            <a:solidFill>
+              <a:srgbClr val="333333">
+                <a:alpha val="0"/>
+              </a:srgbClr>
+            </a:solidFill>
+            <a:prstDash val="solid"/>
+          </a:ln>
+        </p:spPr>
+      </p:sp>
+      <p:sp>
+        <p:nvSpPr>
+          <p:cNvPr id="3" name="Shape 1"/>
+          <p:cNvSpPr/>
+          <p:nvPr/>
+        </p:nvSpPr>
+        <p:spPr>
+          <a:xfrm>
+            <a:off x="0" y="0"/>
+            <a:ext cx="164592" cy="6858000"/>
+          </a:xfrm>
+          <a:prstGeom prst="rect">
+            <a:avLst/>
+          </a:prstGeom>
+          <a:solidFill>
+            <a:srgbClr val="F2B366"/>
+          </a:solidFill>
+          <a:ln w="12700">
+            <a:solidFill>
+              <a:srgbClr val="333333">
+                <a:alpha val="0"/>
+              </a:srgbClr>
+            </a:solidFill>
+            <a:prstDash val="solid"/>
+          </a:ln>
+        </p:spPr>
+      </p:sp>
+      <p:sp>
+        <p:nvSpPr>
+          <p:cNvPr id="4" name="Shape 2"/>
+          <p:cNvSpPr/>
+          <p:nvPr/>
+        </p:nvSpPr>
+        <p:spPr>
+          <a:xfrm>
+            <a:off x="8001000" y="-1627632"/>
+            <a:ext cx="5303520" cy="5303520"/>
+          </a:xfrm>
+          <a:prstGeom prst="arc">
+            <a:avLst/>
+          </a:prstGeom>
+          <a:solidFill>
+            <a:srgbClr val="1F4E79">
+              <a:alpha val="65000"/>
+            </a:srgbClr>
+          </a:solidFill>
+          <a:ln w="12700">
+            <a:solidFill>
+              <a:srgbClr val="333333">
+                <a:alpha val="0"/>
+              </a:srgbClr>
+            </a:solidFill>
+            <a:prstDash val="solid"/>
+          </a:ln>
+        </p:spPr>
+      </p:sp>
+      <p:sp>
+        <p:nvSpPr>
+          <p:cNvPr id="5" name="Shape 3"/>
+          <p:cNvSpPr/>
+          <p:nvPr/>
+        </p:nvSpPr>
+        <p:spPr>
+          <a:xfrm>
+            <a:off x="676656" y="1609344"/>
+            <a:ext cx="1051560" cy="50292"/>
+          </a:xfrm>
+          <a:prstGeom prst="rect">
+            <a:avLst/>
+          </a:prstGeom>
+          <a:solidFill>
+            <a:srgbClr val="F2B366"/>
+          </a:solidFill>
+          <a:ln w="12700">
+            <a:solidFill>
+              <a:srgbClr val="333333">
+                <a:alpha val="0"/>
+              </a:srgbClr>
+            </a:solidFill>
+            <a:prstDash val="solid"/>
+          </a:ln>
+        </p:spPr>
+      </p:sp>
+      <p:sp>
+        <p:nvSpPr>
+          <p:cNvPr id="6" name="Text 4"/>
+          <p:cNvSpPr/>
+          <p:nvPr/>
+        </p:nvSpPr>
+        <p:spPr>
+          <a:xfrm>
+            <a:off x="676656" y="1938528"/>
+            <a:ext cx="6858000" cy="164592"/>
+          </a:xfrm>
+          <a:prstGeom prst="rect">
+            <a:avLst/>
+          </a:prstGeom>
+          <a:noFill/>
+          <a:ln/>
+        </p:spPr>
+        <p:txBody>
+          <a:bodyPr wrap="square" lIns="0" tIns="0" rIns="0" bIns="0" rtlCol="0" anchor="ctr">
+            <a:normAutofit/>
+          </a:bodyPr>
+          <a:lstStyle/>
+          <a:p>
+            <a:pPr indent="0" marL="0">
+              <a:buNone/>
+            </a:pPr>
+            <a:r>
+              <a:rPr lang="en-US" sz="820" b="1" dirty="0">
+                <a:solidFill>
+                  <a:srgbClr val="F2B366"/>
+                </a:solidFill>
+                <a:latin typeface="Aptos" pitchFamily="34" charset="0"/>
+                <a:ea typeface="Aptos" pitchFamily="34" charset="-122"/>
+                <a:cs typeface="Aptos" pitchFamily="34" charset="-120"/>
+              </a:rPr>
+              <a:t>PART 6</a:t>
+            </a:r>
+            <a:endParaRPr lang="en-US" sz="820" dirty="0"/>
+          </a:p>
+        </p:txBody>
+      </p:sp>
+      <p:sp>
+        <p:nvSpPr>
+          <p:cNvPr id="7" name="Text 5"/>
+          <p:cNvSpPr/>
+          <p:nvPr/>
+        </p:nvSpPr>
+        <p:spPr>
+          <a:xfrm>
+            <a:off x="676656" y="2340864"/>
+            <a:ext cx="8915400" cy="1115568"/>
+          </a:xfrm>
+          <a:prstGeom prst="rect">
+            <a:avLst/>
+          </a:prstGeom>
+          <a:noFill/>
+          <a:ln/>
+        </p:spPr>
+        <p:txBody>
+          <a:bodyPr wrap="square" lIns="0" tIns="0" rIns="0" bIns="0" rtlCol="0" anchor="ctr">
+            <a:normAutofit/>
+          </a:bodyPr>
+          <a:lstStyle/>
+          <a:p>
+            <a:pPr indent="0" marL="0">
+              <a:buNone/>
+            </a:pPr>
+            <a:r>
+              <a:rPr lang="en-US" sz="3500" b="1" dirty="0">
+                <a:solidFill>
+                  <a:srgbClr val="FFFFFF"/>
+                </a:solidFill>
+                <a:latin typeface="Aptos Display" pitchFamily="34" charset="0"/>
+                <a:ea typeface="Aptos Display" pitchFamily="34" charset="-122"/>
+                <a:cs typeface="Aptos Display" pitchFamily="34" charset="-120"/>
+              </a:rPr>
+              <a:t>Image Layouts</a:t>
+            </a:r>
+            <a:endParaRPr lang="en-US" sz="3500" dirty="0"/>
+          </a:p>
+        </p:txBody>
+      </p:sp>
+      <p:sp>
+        <p:nvSpPr>
+          <p:cNvPr id="8" name="Text 6"/>
+          <p:cNvSpPr/>
+          <p:nvPr/>
+        </p:nvSpPr>
+        <p:spPr>
+          <a:xfrm>
+            <a:off x="694944" y="3730752"/>
+            <a:ext cx="8001000" cy="658368"/>
+          </a:xfrm>
+          <a:prstGeom prst="rect">
+            <a:avLst/>
+          </a:prstGeom>
+          <a:noFill/>
+          <a:ln/>
+        </p:spPr>
+        <p:txBody>
+          <a:bodyPr wrap="square" lIns="254" tIns="254" rIns="254" bIns="254" rtlCol="0" anchor="t">
+            <a:normAutofit/>
+          </a:bodyPr>
+          <a:lstStyle/>
+          <a:p>
+            <a:pPr indent="0" marL="0">
+              <a:buNone/>
+            </a:pPr>
+            <a:r>
+              <a:rPr lang="en-US" sz="1700" dirty="0">
+                <a:solidFill>
+                  <a:srgbClr val="FFFFFF"/>
+                </a:solidFill>
+                <a:latin typeface="Aptos" pitchFamily="34" charset="0"/>
+                <a:ea typeface="Aptos" pitchFamily="34" charset="-122"/>
+                <a:cs typeface="Aptos" pitchFamily="34" charset="-120"/>
+              </a:rPr>
+              <a:t>Slides with photos and visual content</a:t>
+            </a:r>
+            <a:endParaRPr lang="en-US" sz="1700" dirty="0"/>
+          </a:p>
+        </p:txBody>
+      </p:sp>
+      <p:sp>
+        <p:nvSpPr>
+          <p:cNvPr id="9" name="Shape 7"/>
+          <p:cNvSpPr/>
+          <p:nvPr/>
+        </p:nvSpPr>
+        <p:spPr>
+          <a:xfrm>
+            <a:off x="658368" y="6382512"/>
+            <a:ext cx="10874959" cy="0"/>
+          </a:xfrm>
+          <a:prstGeom prst="line">
+            <a:avLst/>
+          </a:prstGeom>
+          <a:noFill/>
+          <a:ln w="6985">
+            <a:solidFill>
+              <a:srgbClr val="DDE6F0">
+                <a:alpha val="90000"/>
+              </a:srgbClr>
+            </a:solidFill>
+            <a:prstDash val="solid"/>
+          </a:ln>
+        </p:spPr>
+      </p:sp>
+      <p:sp>
+        <p:nvSpPr>
+          <p:cNvPr id="10" name="Text 8"/>
+          <p:cNvSpPr/>
+          <p:nvPr/>
+        </p:nvSpPr>
+        <p:spPr>
+          <a:xfrm>
+            <a:off x="658368" y="6537960"/>
+            <a:ext cx="6172200" cy="146304"/>
+          </a:xfrm>
+          <a:prstGeom prst="rect">
+            <a:avLst/>
+          </a:prstGeom>
+          <a:noFill/>
+          <a:ln/>
+        </p:spPr>
+        <p:txBody>
+          <a:bodyPr wrap="square" lIns="0" tIns="0" rIns="0" bIns="0" rtlCol="0" anchor="ctr"/>
+          <a:lstStyle/>
+          <a:p>
+            <a:pPr indent="0" marL="0">
+              <a:buNone/>
+            </a:pPr>
+            <a:r>
+              <a:rPr lang="en-US" sz="750" dirty="0">
+                <a:solidFill>
+                  <a:srgbClr val="667085"/>
+                </a:solidFill>
+                <a:latin typeface="Aptos" pitchFamily="34" charset="0"/>
+                <a:ea typeface="Aptos" pitchFamily="34" charset="-122"/>
+                <a:cs typeface="Aptos" pitchFamily="34" charset="-120"/>
+              </a:rPr>
+              <a:t>Headless Slide Builder Demo</a:t>
+            </a:r>
+            <a:endParaRPr lang="en-US" sz="750" dirty="0"/>
+          </a:p>
+        </p:txBody>
+      </p:sp>
+      <p:sp>
+        <p:nvSpPr>
+          <p:cNvPr id="11" name="Text 9"/>
+          <p:cNvSpPr/>
+          <p:nvPr/>
+        </p:nvSpPr>
+        <p:spPr>
+          <a:xfrm>
+            <a:off x="10509199" y="6537960"/>
+            <a:ext cx="502920" cy="146304"/>
+          </a:xfrm>
+          <a:prstGeom prst="rect">
+            <a:avLst/>
+          </a:prstGeom>
+          <a:noFill/>
+          <a:ln/>
+        </p:spPr>
+        <p:txBody>
+          <a:bodyPr wrap="square" lIns="0" tIns="0" rIns="0" bIns="0" rtlCol="0" anchor="ctr"/>
+          <a:lstStyle/>
+          <a:p>
+            <a:pPr algn="r" indent="0" marL="0">
+              <a:buNone/>
+            </a:pPr>
+            <a:r>
+              <a:rPr lang="en-US" sz="750" b="1" dirty="0">
+                <a:solidFill>
+                  <a:srgbClr val="1F4E79"/>
+                </a:solidFill>
+                <a:latin typeface="Aptos" pitchFamily="34" charset="0"/>
+                <a:ea typeface="Aptos" pitchFamily="34" charset="-122"/>
+                <a:cs typeface="Aptos" pitchFamily="34" charset="-120"/>
+              </a:rPr>
+              <a:t>22</a:t>
+            </a:r>
+            <a:endParaRPr lang="en-US" sz="750" dirty="0"/>
+          </a:p>
+        </p:txBody>
+      </p:sp>
+    </p:spTree>
+  </p:cSld>
+  <p:clrMapOvr>
+    <a:masterClrMapping/>
+  </p:clrMapOvr>
+</p:sld>
+</file>
+
+<file path=ppt/slides/slide23.xml><?xml version="1.0" encoding="utf-8"?>
+<p:sld xmlns:a="http://schemas.openxmlformats.org/drawingml/2006/main" xmlns:r="http://schemas.openxmlformats.org/officeDocument/2006/relationships" xmlns:p="http://schemas.openxmlformats.org/presentationml/2006/main">
+  <p:cSld name="Slide 23">
+    <p:bg>
+      <p:bgPr>
+        <a:solidFill>
           <a:srgbClr val="F6F8FB"/>
         </a:solidFill>
       </p:bgPr>
@@ -15352,7 +16165,1988 @@
                 <a:ea typeface="Aptos" pitchFamily="34" charset="-122"/>
                 <a:cs typeface="Aptos" pitchFamily="34" charset="-120"/>
               </a:rPr>
-              <a:t>22</a:t>
+              <a:t>23</a:t>
+            </a:r>
+            <a:endParaRPr lang="en-US" sz="750" dirty="0"/>
+          </a:p>
+        </p:txBody>
+      </p:sp>
+      <p:sp>
+        <p:nvSpPr>
+          <p:cNvPr id="8" name="Text 6"/>
+          <p:cNvSpPr/>
+          <p:nvPr/>
+        </p:nvSpPr>
+        <p:spPr>
+          <a:xfrm>
+            <a:off x="658368" y="256032"/>
+            <a:ext cx="5486400" cy="164592"/>
+          </a:xfrm>
+          <a:prstGeom prst="rect">
+            <a:avLst/>
+          </a:prstGeom>
+          <a:noFill/>
+          <a:ln/>
+        </p:spPr>
+        <p:txBody>
+          <a:bodyPr wrap="square" lIns="0" tIns="0" rIns="0" bIns="0" rtlCol="0" anchor="ctr">
+            <a:normAutofit/>
+          </a:bodyPr>
+          <a:lstStyle/>
+          <a:p>
+            <a:pPr indent="0" marL="0">
+              <a:buNone/>
+            </a:pPr>
+            <a:r>
+              <a:rPr lang="en-US" sz="820" b="1" dirty="0">
+                <a:solidFill>
+                  <a:srgbClr val="4F8FCF"/>
+                </a:solidFill>
+                <a:latin typeface="Aptos" pitchFamily="34" charset="0"/>
+                <a:ea typeface="Aptos" pitchFamily="34" charset="-122"/>
+                <a:cs typeface="Aptos" pitchFamily="34" charset="-120"/>
+              </a:rPr>
+              <a:t>LAYOUT: IMAGE_LEFT</a:t>
+            </a:r>
+            <a:endParaRPr lang="en-US" sz="820" dirty="0"/>
+          </a:p>
+        </p:txBody>
+      </p:sp>
+      <p:sp>
+        <p:nvSpPr>
+          <p:cNvPr id="9" name="Text 7"/>
+          <p:cNvSpPr/>
+          <p:nvPr/>
+        </p:nvSpPr>
+        <p:spPr>
+          <a:xfrm>
+            <a:off x="658368" y="512064"/>
+            <a:ext cx="10874959" cy="502920"/>
+          </a:xfrm>
+          <a:prstGeom prst="rect">
+            <a:avLst/>
+          </a:prstGeom>
+          <a:noFill/>
+          <a:ln/>
+        </p:spPr>
+        <p:txBody>
+          <a:bodyPr wrap="square" lIns="0" tIns="0" rIns="0" bIns="0" rtlCol="0" anchor="ctr">
+            <a:normAutofit/>
+          </a:bodyPr>
+          <a:lstStyle/>
+          <a:p>
+            <a:pPr indent="0" marL="0">
+              <a:buNone/>
+            </a:pPr>
+            <a:r>
+              <a:rPr lang="en-US" sz="3100" b="1" dirty="0">
+                <a:solidFill>
+                  <a:srgbClr val="172033"/>
+                </a:solidFill>
+                <a:latin typeface="Aptos Display" pitchFamily="34" charset="0"/>
+                <a:ea typeface="Aptos Display" pitchFamily="34" charset="-122"/>
+                <a:cs typeface="Aptos Display" pitchFamily="34" charset="-120"/>
+              </a:rPr>
+              <a:t>Image Left Layout</a:t>
+            </a:r>
+            <a:endParaRPr lang="en-US" sz="3100" dirty="0"/>
+          </a:p>
+        </p:txBody>
+      </p:sp>
+      <p:sp>
+        <p:nvSpPr>
+          <p:cNvPr id="10" name="Shape 8"/>
+          <p:cNvSpPr/>
+          <p:nvPr/>
+        </p:nvSpPr>
+        <p:spPr>
+          <a:xfrm>
+            <a:off x="658368" y="1120140"/>
+            <a:ext cx="676656" cy="39319"/>
+          </a:xfrm>
+          <a:prstGeom prst="rect">
+            <a:avLst/>
+          </a:prstGeom>
+          <a:solidFill>
+            <a:srgbClr val="F2B366"/>
+          </a:solidFill>
+          <a:ln w="12700">
+            <a:solidFill>
+              <a:srgbClr val="F2B366">
+                <a:alpha val="0"/>
+              </a:srgbClr>
+            </a:solidFill>
+            <a:prstDash val="solid"/>
+          </a:ln>
+        </p:spPr>
+      </p:sp>
+      <p:sp>
+        <p:nvSpPr>
+          <p:cNvPr id="11" name="Shape 9"/>
+          <p:cNvSpPr/>
+          <p:nvPr/>
+        </p:nvSpPr>
+        <p:spPr>
+          <a:xfrm>
+            <a:off x="658368" y="1417320"/>
+            <a:ext cx="5010912" cy="4224528"/>
+          </a:xfrm>
+          <a:prstGeom prst="roundRect">
+            <a:avLst>
+              <a:gd name="adj" fmla="val 3463"/>
+            </a:avLst>
+          </a:prstGeom>
+          <a:solidFill>
+            <a:srgbClr val="FFFFFF"/>
+          </a:solidFill>
+          <a:ln w="8890">
+            <a:solidFill>
+              <a:srgbClr val="DDE6F0"/>
+            </a:solidFill>
+            <a:prstDash val="solid"/>
+          </a:ln>
+          <a:effectLst>
+            <a:outerShdw sx="100000" sy="100000" kx="0" ky="0" algn="bl" rotWithShape="0" blurRad="13970" dist="50800" dir="2700000">
+              <a:srgbClr val="C9D3DF">
+                <a:alpha val="13000"/>
+              </a:srgbClr>
+            </a:outerShdw>
+          </a:effectLst>
+        </p:spPr>
+      </p:sp>
+      <p:pic>
+        <p:nvPicPr>
+          <p:cNvPr id="12" name="Image 0" descr="/home/runner/work/headless-slide-builder-js/headless-slide-builder-js/assets/images/test-meeting.png">    </p:cNvPr>
+          <p:cNvPicPr>
+            <a:picLocks noChangeAspect="1"/>
+          </p:cNvPicPr>
+          <p:nvPr/>
+        </p:nvPicPr>
+        <p:blipFill>
+          <a:blip r:embed="rId1"/>
+          <a:srcRect l="16547" r="16547" t="0" b="0"/>
+          <a:stretch/>
+        </p:blipFill>
+        <p:spPr>
+          <a:xfrm>
+            <a:off x="694944" y="1453896"/>
+            <a:ext cx="4937760" cy="4151376"/>
+          </a:xfrm>
+          <a:prstGeom prst="rect">
+            <a:avLst/>
+          </a:prstGeom>
+        </p:spPr>
+      </p:pic>
+      <p:sp>
+        <p:nvSpPr>
+          <p:cNvPr id="13" name="Shape 10"/>
+          <p:cNvSpPr/>
+          <p:nvPr/>
+        </p:nvSpPr>
+        <p:spPr>
+          <a:xfrm>
+            <a:off x="6108192" y="1481328"/>
+            <a:ext cx="5102352" cy="4041648"/>
+          </a:xfrm>
+          <a:prstGeom prst="roundRect">
+            <a:avLst>
+              <a:gd name="adj" fmla="val 3620"/>
+            </a:avLst>
+          </a:prstGeom>
+          <a:solidFill>
+            <a:srgbClr val="FFFFFF"/>
+          </a:solidFill>
+          <a:ln w="8890">
+            <a:solidFill>
+              <a:srgbClr val="DDE6F0"/>
+            </a:solidFill>
+            <a:prstDash val="solid"/>
+          </a:ln>
+          <a:effectLst>
+            <a:outerShdw sx="100000" sy="100000" kx="0" ky="0" algn="bl" rotWithShape="0" blurRad="13970" dist="50800" dir="2700000">
+              <a:srgbClr val="C9D3DF">
+                <a:alpha val="13000"/>
+              </a:srgbClr>
+            </a:outerShdw>
+          </a:effectLst>
+        </p:spPr>
+      </p:sp>
+      <p:sp>
+        <p:nvSpPr>
+          <p:cNvPr id="14" name="Shape 11"/>
+          <p:cNvSpPr/>
+          <p:nvPr/>
+        </p:nvSpPr>
+        <p:spPr>
+          <a:xfrm>
+            <a:off x="6428232" y="1810512"/>
+            <a:ext cx="658368" cy="47549"/>
+          </a:xfrm>
+          <a:prstGeom prst="rect">
+            <a:avLst/>
+          </a:prstGeom>
+          <a:solidFill>
+            <a:srgbClr val="F2B366"/>
+          </a:solidFill>
+          <a:ln w="12700">
+            <a:solidFill>
+              <a:srgbClr val="333333">
+                <a:alpha val="0"/>
+              </a:srgbClr>
+            </a:solidFill>
+            <a:prstDash val="solid"/>
+          </a:ln>
+        </p:spPr>
+      </p:sp>
+      <p:sp>
+        <p:nvSpPr>
+          <p:cNvPr id="15" name="Text 12"/>
+          <p:cNvSpPr/>
+          <p:nvPr/>
+        </p:nvSpPr>
+        <p:spPr>
+          <a:xfrm>
+            <a:off x="6455664" y="2084832"/>
+            <a:ext cx="4407408" cy="1005840"/>
+          </a:xfrm>
+          <a:prstGeom prst="rect">
+            <a:avLst/>
+          </a:prstGeom>
+          <a:noFill/>
+          <a:ln/>
+        </p:spPr>
+        <p:txBody>
+          <a:bodyPr wrap="square" lIns="254" tIns="254" rIns="254" bIns="254" rtlCol="0" anchor="t">
+            <a:normAutofit/>
+          </a:bodyPr>
+          <a:lstStyle/>
+          <a:p>
+            <a:pPr indent="0" marL="0">
+              <a:buNone/>
+            </a:pPr>
+            <a:r>
+              <a:rPr lang="en-US" sz="1640" dirty="0">
+                <a:solidFill>
+                  <a:srgbClr val="172033"/>
+                </a:solidFill>
+                <a:latin typeface="Aptos" pitchFamily="34" charset="0"/>
+                <a:ea typeface="Aptos" pitchFamily="34" charset="-122"/>
+                <a:cs typeface="Aptos" pitchFamily="34" charset="-120"/>
+              </a:rPr>
+              <a:t>Place an image on the left half with text content on the right.</a:t>
+            </a:r>
+            <a:endParaRPr lang="en-US" sz="1640" dirty="0"/>
+          </a:p>
+        </p:txBody>
+      </p:sp>
+      <p:sp>
+        <p:nvSpPr>
+          <p:cNvPr id="16" name="Text 13"/>
+          <p:cNvSpPr/>
+          <p:nvPr/>
+        </p:nvSpPr>
+        <p:spPr>
+          <a:xfrm>
+            <a:off x="6528816" y="3273552"/>
+            <a:ext cx="4261104" cy="1938528"/>
+          </a:xfrm>
+          <a:prstGeom prst="rect">
+            <a:avLst/>
+          </a:prstGeom>
+          <a:noFill/>
+          <a:ln/>
+        </p:spPr>
+        <p:txBody>
+          <a:bodyPr wrap="square" lIns="445" tIns="445" rIns="445" bIns="445" rtlCol="0" anchor="ctr">
+            <a:normAutofit/>
+          </a:bodyPr>
+          <a:lstStyle/>
+          <a:p>
+            <a:pPr indent="0" marL="0">
+              <a:buNone/>
+            </a:pPr>
+            <a:r>
+              <a:rPr lang="en-US" sz="1540" dirty="0">
+                <a:solidFill>
+                  <a:srgbClr val="172033"/>
+                </a:solidFill>
+                <a:latin typeface="Aptos" pitchFamily="34" charset="0"/>
+                <a:ea typeface="Aptos" pitchFamily="34" charset="-122"/>
+                <a:cs typeface="Aptos" pitchFamily="34" charset="-120"/>
+              </a:rPr>
+              <a:t>• Ideal for product screenshots or diagrams</a:t>
+            </a:r>
+            <a:endParaRPr lang="en-US" sz="1540" dirty="0"/>
+          </a:p>
+          <a:p>
+            <a:pPr indent="0" marL="0">
+              <a:buNone/>
+            </a:pPr>
+            <a:r>
+              <a:rPr lang="en-US" sz="1540" dirty="0">
+                <a:solidFill>
+                  <a:srgbClr val="172033"/>
+                </a:solidFill>
+                <a:latin typeface="Aptos" pitchFamily="34" charset="0"/>
+                <a:ea typeface="Aptos" pitchFamily="34" charset="-122"/>
+                <a:cs typeface="Aptos" pitchFamily="34" charset="-120"/>
+              </a:rPr>
+              <a:t>• Text block floats right of the image</a:t>
+            </a:r>
+            <a:endParaRPr lang="en-US" sz="1540" dirty="0"/>
+          </a:p>
+          <a:p>
+            <a:pPr indent="0" marL="0">
+              <a:buNone/>
+            </a:pPr>
+            <a:r>
+              <a:rPr lang="en-US" sz="1540" dirty="0">
+                <a:solidFill>
+                  <a:srgbClr val="172033"/>
+                </a:solidFill>
+                <a:latin typeface="Aptos" pitchFamily="34" charset="0"/>
+                <a:ea typeface="Aptos" pitchFamily="34" charset="-122"/>
+                <a:cs typeface="Aptos" pitchFamily="34" charset="-120"/>
+              </a:rPr>
+              <a:t>• Caption and attribution supported</a:t>
+            </a:r>
+            <a:endParaRPr lang="en-US" sz="1540" dirty="0"/>
+          </a:p>
+        </p:txBody>
+      </p:sp>
+    </p:spTree>
+  </p:cSld>
+  <p:clrMapOvr>
+    <a:masterClrMapping/>
+  </p:clrMapOvr>
+</p:sld>
+</file>
+
+<file path=ppt/slides/slide24.xml><?xml version="1.0" encoding="utf-8"?>
+<p:sld xmlns:a="http://schemas.openxmlformats.org/drawingml/2006/main" xmlns:r="http://schemas.openxmlformats.org/officeDocument/2006/relationships" xmlns:p="http://schemas.openxmlformats.org/presentationml/2006/main">
+  <p:cSld name="Slide 24">
+    <p:bg>
+      <p:bgPr>
+        <a:solidFill>
+          <a:srgbClr val="F6F8FB"/>
+        </a:solidFill>
+      </p:bgPr>
+    </p:bg>
+    <p:spTree>
+      <p:nvGrpSpPr>
+        <p:cNvPr id="1" name=""/>
+        <p:cNvGrpSpPr/>
+        <p:nvPr/>
+      </p:nvGrpSpPr>
+      <p:grpSpPr>
+        <a:xfrm>
+          <a:off x="0" y="0"/>
+          <a:ext cx="0" cy="0"/>
+          <a:chOff x="0" y="0"/>
+          <a:chExt cx="0" cy="0"/>
+        </a:xfrm>
+      </p:grpSpPr>
+      <p:sp>
+        <p:nvSpPr>
+          <p:cNvPr id="2" name="Shape 0"/>
+          <p:cNvSpPr/>
+          <p:nvPr/>
+        </p:nvSpPr>
+        <p:spPr>
+          <a:xfrm>
+            <a:off x="9921240" y="-914400"/>
+            <a:ext cx="2926080" cy="2926080"/>
+          </a:xfrm>
+          <a:prstGeom prst="arc">
+            <a:avLst/>
+          </a:prstGeom>
+          <a:solidFill>
+            <a:srgbClr val="4F8FCF">
+              <a:alpha val="10000"/>
+            </a:srgbClr>
+          </a:solidFill>
+          <a:ln w="12700">
+            <a:solidFill>
+              <a:srgbClr val="4F8FCF">
+                <a:alpha val="0"/>
+              </a:srgbClr>
+            </a:solidFill>
+            <a:prstDash val="solid"/>
+          </a:ln>
+        </p:spPr>
+      </p:sp>
+      <p:sp>
+        <p:nvSpPr>
+          <p:cNvPr id="3" name="Shape 1"/>
+          <p:cNvSpPr/>
+          <p:nvPr/>
+        </p:nvSpPr>
+        <p:spPr>
+          <a:xfrm>
+            <a:off x="-1051560" y="5394960"/>
+            <a:ext cx="2148840" cy="2148840"/>
+          </a:xfrm>
+          <a:prstGeom prst="arc">
+            <a:avLst/>
+          </a:prstGeom>
+          <a:solidFill>
+            <a:srgbClr val="F2B366">
+              <a:alpha val="9000"/>
+            </a:srgbClr>
+          </a:solidFill>
+          <a:ln w="12700">
+            <a:solidFill>
+              <a:srgbClr val="F2B366">
+                <a:alpha val="0"/>
+              </a:srgbClr>
+            </a:solidFill>
+            <a:prstDash val="solid"/>
+          </a:ln>
+        </p:spPr>
+      </p:sp>
+      <p:sp>
+        <p:nvSpPr>
+          <p:cNvPr id="4" name="Shape 2"/>
+          <p:cNvSpPr/>
+          <p:nvPr/>
+        </p:nvSpPr>
+        <p:spPr>
+          <a:xfrm>
+            <a:off x="0" y="0"/>
+            <a:ext cx="12191695" cy="68580"/>
+          </a:xfrm>
+          <a:prstGeom prst="rect">
+            <a:avLst/>
+          </a:prstGeom>
+          <a:solidFill>
+            <a:srgbClr val="1F4E79"/>
+          </a:solidFill>
+          <a:ln w="12700">
+            <a:solidFill>
+              <a:srgbClr val="1F4E79">
+                <a:alpha val="0"/>
+              </a:srgbClr>
+            </a:solidFill>
+            <a:prstDash val="solid"/>
+          </a:ln>
+        </p:spPr>
+      </p:sp>
+      <p:sp>
+        <p:nvSpPr>
+          <p:cNvPr id="5" name="Shape 3"/>
+          <p:cNvSpPr/>
+          <p:nvPr/>
+        </p:nvSpPr>
+        <p:spPr>
+          <a:xfrm>
+            <a:off x="658368" y="6382512"/>
+            <a:ext cx="10874959" cy="0"/>
+          </a:xfrm>
+          <a:prstGeom prst="line">
+            <a:avLst/>
+          </a:prstGeom>
+          <a:noFill/>
+          <a:ln w="6985">
+            <a:solidFill>
+              <a:srgbClr val="DDE6F0">
+                <a:alpha val="90000"/>
+              </a:srgbClr>
+            </a:solidFill>
+            <a:prstDash val="solid"/>
+          </a:ln>
+        </p:spPr>
+      </p:sp>
+      <p:sp>
+        <p:nvSpPr>
+          <p:cNvPr id="6" name="Text 4"/>
+          <p:cNvSpPr/>
+          <p:nvPr/>
+        </p:nvSpPr>
+        <p:spPr>
+          <a:xfrm>
+            <a:off x="658368" y="6537960"/>
+            <a:ext cx="6172200" cy="146304"/>
+          </a:xfrm>
+          <a:prstGeom prst="rect">
+            <a:avLst/>
+          </a:prstGeom>
+          <a:noFill/>
+          <a:ln/>
+        </p:spPr>
+        <p:txBody>
+          <a:bodyPr wrap="square" lIns="0" tIns="0" rIns="0" bIns="0" rtlCol="0" anchor="ctr"/>
+          <a:lstStyle/>
+          <a:p>
+            <a:pPr indent="0" marL="0">
+              <a:buNone/>
+            </a:pPr>
+            <a:r>
+              <a:rPr lang="en-US" sz="750" dirty="0">
+                <a:solidFill>
+                  <a:srgbClr val="667085"/>
+                </a:solidFill>
+                <a:latin typeface="Aptos" pitchFamily="34" charset="0"/>
+                <a:ea typeface="Aptos" pitchFamily="34" charset="-122"/>
+                <a:cs typeface="Aptos" pitchFamily="34" charset="-120"/>
+              </a:rPr>
+              <a:t>Headless Slide Builder Demo</a:t>
+            </a:r>
+            <a:endParaRPr lang="en-US" sz="750" dirty="0"/>
+          </a:p>
+        </p:txBody>
+      </p:sp>
+      <p:sp>
+        <p:nvSpPr>
+          <p:cNvPr id="7" name="Text 5"/>
+          <p:cNvSpPr/>
+          <p:nvPr/>
+        </p:nvSpPr>
+        <p:spPr>
+          <a:xfrm>
+            <a:off x="10509199" y="6537960"/>
+            <a:ext cx="502920" cy="146304"/>
+          </a:xfrm>
+          <a:prstGeom prst="rect">
+            <a:avLst/>
+          </a:prstGeom>
+          <a:noFill/>
+          <a:ln/>
+        </p:spPr>
+        <p:txBody>
+          <a:bodyPr wrap="square" lIns="0" tIns="0" rIns="0" bIns="0" rtlCol="0" anchor="ctr"/>
+          <a:lstStyle/>
+          <a:p>
+            <a:pPr algn="r" indent="0" marL="0">
+              <a:buNone/>
+            </a:pPr>
+            <a:r>
+              <a:rPr lang="en-US" sz="750" b="1" dirty="0">
+                <a:solidFill>
+                  <a:srgbClr val="1F4E79"/>
+                </a:solidFill>
+                <a:latin typeface="Aptos" pitchFamily="34" charset="0"/>
+                <a:ea typeface="Aptos" pitchFamily="34" charset="-122"/>
+                <a:cs typeface="Aptos" pitchFamily="34" charset="-120"/>
+              </a:rPr>
+              <a:t>24</a:t>
+            </a:r>
+            <a:endParaRPr lang="en-US" sz="750" dirty="0"/>
+          </a:p>
+        </p:txBody>
+      </p:sp>
+      <p:sp>
+        <p:nvSpPr>
+          <p:cNvPr id="8" name="Text 6"/>
+          <p:cNvSpPr/>
+          <p:nvPr/>
+        </p:nvSpPr>
+        <p:spPr>
+          <a:xfrm>
+            <a:off x="658368" y="256032"/>
+            <a:ext cx="5486400" cy="164592"/>
+          </a:xfrm>
+          <a:prstGeom prst="rect">
+            <a:avLst/>
+          </a:prstGeom>
+          <a:noFill/>
+          <a:ln/>
+        </p:spPr>
+        <p:txBody>
+          <a:bodyPr wrap="square" lIns="0" tIns="0" rIns="0" bIns="0" rtlCol="0" anchor="ctr">
+            <a:normAutofit/>
+          </a:bodyPr>
+          <a:lstStyle/>
+          <a:p>
+            <a:pPr indent="0" marL="0">
+              <a:buNone/>
+            </a:pPr>
+            <a:r>
+              <a:rPr lang="en-US" sz="820" b="1" dirty="0">
+                <a:solidFill>
+                  <a:srgbClr val="4F8FCF"/>
+                </a:solidFill>
+                <a:latin typeface="Aptos" pitchFamily="34" charset="0"/>
+                <a:ea typeface="Aptos" pitchFamily="34" charset="-122"/>
+                <a:cs typeface="Aptos" pitchFamily="34" charset="-120"/>
+              </a:rPr>
+              <a:t>LAYOUT: IMAGE_RIGHT</a:t>
+            </a:r>
+            <a:endParaRPr lang="en-US" sz="820" dirty="0"/>
+          </a:p>
+        </p:txBody>
+      </p:sp>
+      <p:sp>
+        <p:nvSpPr>
+          <p:cNvPr id="9" name="Text 7"/>
+          <p:cNvSpPr/>
+          <p:nvPr/>
+        </p:nvSpPr>
+        <p:spPr>
+          <a:xfrm>
+            <a:off x="658368" y="512064"/>
+            <a:ext cx="10874959" cy="502920"/>
+          </a:xfrm>
+          <a:prstGeom prst="rect">
+            <a:avLst/>
+          </a:prstGeom>
+          <a:noFill/>
+          <a:ln/>
+        </p:spPr>
+        <p:txBody>
+          <a:bodyPr wrap="square" lIns="0" tIns="0" rIns="0" bIns="0" rtlCol="0" anchor="ctr">
+            <a:normAutofit/>
+          </a:bodyPr>
+          <a:lstStyle/>
+          <a:p>
+            <a:pPr indent="0" marL="0">
+              <a:buNone/>
+            </a:pPr>
+            <a:r>
+              <a:rPr lang="en-US" sz="3100" b="1" dirty="0">
+                <a:solidFill>
+                  <a:srgbClr val="172033"/>
+                </a:solidFill>
+                <a:latin typeface="Aptos Display" pitchFamily="34" charset="0"/>
+                <a:ea typeface="Aptos Display" pitchFamily="34" charset="-122"/>
+                <a:cs typeface="Aptos Display" pitchFamily="34" charset="-120"/>
+              </a:rPr>
+              <a:t>Image Right Layout</a:t>
+            </a:r>
+            <a:endParaRPr lang="en-US" sz="3100" dirty="0"/>
+          </a:p>
+        </p:txBody>
+      </p:sp>
+      <p:sp>
+        <p:nvSpPr>
+          <p:cNvPr id="10" name="Shape 8"/>
+          <p:cNvSpPr/>
+          <p:nvPr/>
+        </p:nvSpPr>
+        <p:spPr>
+          <a:xfrm>
+            <a:off x="658368" y="1120140"/>
+            <a:ext cx="676656" cy="39319"/>
+          </a:xfrm>
+          <a:prstGeom prst="rect">
+            <a:avLst/>
+          </a:prstGeom>
+          <a:solidFill>
+            <a:srgbClr val="F2B366"/>
+          </a:solidFill>
+          <a:ln w="12700">
+            <a:solidFill>
+              <a:srgbClr val="F2B366">
+                <a:alpha val="0"/>
+              </a:srgbClr>
+            </a:solidFill>
+            <a:prstDash val="solid"/>
+          </a:ln>
+        </p:spPr>
+      </p:sp>
+      <p:sp>
+        <p:nvSpPr>
+          <p:cNvPr id="11" name="Shape 9"/>
+          <p:cNvSpPr/>
+          <p:nvPr/>
+        </p:nvSpPr>
+        <p:spPr>
+          <a:xfrm>
+            <a:off x="6547104" y="1417320"/>
+            <a:ext cx="5010912" cy="4224528"/>
+          </a:xfrm>
+          <a:prstGeom prst="roundRect">
+            <a:avLst>
+              <a:gd name="adj" fmla="val 3463"/>
+            </a:avLst>
+          </a:prstGeom>
+          <a:solidFill>
+            <a:srgbClr val="FFFFFF"/>
+          </a:solidFill>
+          <a:ln w="8890">
+            <a:solidFill>
+              <a:srgbClr val="DDE6F0"/>
+            </a:solidFill>
+            <a:prstDash val="solid"/>
+          </a:ln>
+          <a:effectLst>
+            <a:outerShdw sx="100000" sy="100000" kx="0" ky="0" algn="bl" rotWithShape="0" blurRad="13970" dist="50800" dir="2700000">
+              <a:srgbClr val="C9D3DF">
+                <a:alpha val="13000"/>
+              </a:srgbClr>
+            </a:outerShdw>
+          </a:effectLst>
+        </p:spPr>
+      </p:sp>
+      <p:pic>
+        <p:nvPicPr>
+          <p:cNvPr id="12" name="Image 0" descr="/home/runner/work/headless-slide-builder-js/headless-slide-builder-js/assets/images/test-workspace.png">    </p:cNvPr>
+          <p:cNvPicPr>
+            <a:picLocks noChangeAspect="1"/>
+          </p:cNvPicPr>
+          <p:nvPr/>
+        </p:nvPicPr>
+        <p:blipFill>
+          <a:blip r:embed="rId1"/>
+          <a:srcRect l="16547" r="16547" t="0" b="0"/>
+          <a:stretch/>
+        </p:blipFill>
+        <p:spPr>
+          <a:xfrm>
+            <a:off x="6583680" y="1453896"/>
+            <a:ext cx="4937760" cy="4151376"/>
+          </a:xfrm>
+          <a:prstGeom prst="rect">
+            <a:avLst/>
+          </a:prstGeom>
+        </p:spPr>
+      </p:pic>
+      <p:sp>
+        <p:nvSpPr>
+          <p:cNvPr id="13" name="Shape 10"/>
+          <p:cNvSpPr/>
+          <p:nvPr/>
+        </p:nvSpPr>
+        <p:spPr>
+          <a:xfrm>
+            <a:off x="658368" y="1481328"/>
+            <a:ext cx="5102352" cy="4041648"/>
+          </a:xfrm>
+          <a:prstGeom prst="roundRect">
+            <a:avLst>
+              <a:gd name="adj" fmla="val 3620"/>
+            </a:avLst>
+          </a:prstGeom>
+          <a:solidFill>
+            <a:srgbClr val="FFFFFF"/>
+          </a:solidFill>
+          <a:ln w="8890">
+            <a:solidFill>
+              <a:srgbClr val="DDE6F0"/>
+            </a:solidFill>
+            <a:prstDash val="solid"/>
+          </a:ln>
+          <a:effectLst>
+            <a:outerShdw sx="100000" sy="100000" kx="0" ky="0" algn="bl" rotWithShape="0" blurRad="13970" dist="50800" dir="2700000">
+              <a:srgbClr val="C9D3DF">
+                <a:alpha val="13000"/>
+              </a:srgbClr>
+            </a:outerShdw>
+          </a:effectLst>
+        </p:spPr>
+      </p:sp>
+      <p:sp>
+        <p:nvSpPr>
+          <p:cNvPr id="14" name="Shape 11"/>
+          <p:cNvSpPr/>
+          <p:nvPr/>
+        </p:nvSpPr>
+        <p:spPr>
+          <a:xfrm>
+            <a:off x="978408" y="1810512"/>
+            <a:ext cx="658368" cy="47549"/>
+          </a:xfrm>
+          <a:prstGeom prst="rect">
+            <a:avLst/>
+          </a:prstGeom>
+          <a:solidFill>
+            <a:srgbClr val="F2B366"/>
+          </a:solidFill>
+          <a:ln w="12700">
+            <a:solidFill>
+              <a:srgbClr val="333333">
+                <a:alpha val="0"/>
+              </a:srgbClr>
+            </a:solidFill>
+            <a:prstDash val="solid"/>
+          </a:ln>
+        </p:spPr>
+      </p:sp>
+      <p:sp>
+        <p:nvSpPr>
+          <p:cNvPr id="15" name="Text 12"/>
+          <p:cNvSpPr/>
+          <p:nvPr/>
+        </p:nvSpPr>
+        <p:spPr>
+          <a:xfrm>
+            <a:off x="1005840" y="2084832"/>
+            <a:ext cx="4407408" cy="1005840"/>
+          </a:xfrm>
+          <a:prstGeom prst="rect">
+            <a:avLst/>
+          </a:prstGeom>
+          <a:noFill/>
+          <a:ln/>
+        </p:spPr>
+        <p:txBody>
+          <a:bodyPr wrap="square" lIns="254" tIns="254" rIns="254" bIns="254" rtlCol="0" anchor="t">
+            <a:normAutofit/>
+          </a:bodyPr>
+          <a:lstStyle/>
+          <a:p>
+            <a:pPr indent="0" marL="0">
+              <a:buNone/>
+            </a:pPr>
+            <a:r>
+              <a:rPr lang="en-US" sz="1640" dirty="0">
+                <a:solidFill>
+                  <a:srgbClr val="172033"/>
+                </a:solidFill>
+                <a:latin typeface="Aptos" pitchFamily="34" charset="0"/>
+                <a:ea typeface="Aptos" pitchFamily="34" charset="-122"/>
+                <a:cs typeface="Aptos" pitchFamily="34" charset="-120"/>
+              </a:rPr>
+              <a:t>Text content on the left with a supporting image on the right.</a:t>
+            </a:r>
+            <a:endParaRPr lang="en-US" sz="1640" dirty="0"/>
+          </a:p>
+        </p:txBody>
+      </p:sp>
+      <p:sp>
+        <p:nvSpPr>
+          <p:cNvPr id="16" name="Text 13"/>
+          <p:cNvSpPr/>
+          <p:nvPr/>
+        </p:nvSpPr>
+        <p:spPr>
+          <a:xfrm>
+            <a:off x="1078992" y="3273552"/>
+            <a:ext cx="4261104" cy="1938528"/>
+          </a:xfrm>
+          <a:prstGeom prst="rect">
+            <a:avLst/>
+          </a:prstGeom>
+          <a:noFill/>
+          <a:ln/>
+        </p:spPr>
+        <p:txBody>
+          <a:bodyPr wrap="square" lIns="445" tIns="445" rIns="445" bIns="445" rtlCol="0" anchor="ctr">
+            <a:normAutofit/>
+          </a:bodyPr>
+          <a:lstStyle/>
+          <a:p>
+            <a:pPr indent="0" marL="0">
+              <a:buNone/>
+            </a:pPr>
+            <a:r>
+              <a:rPr lang="en-US" sz="1540" dirty="0">
+                <a:solidFill>
+                  <a:srgbClr val="172033"/>
+                </a:solidFill>
+                <a:latin typeface="Aptos" pitchFamily="34" charset="0"/>
+                <a:ea typeface="Aptos" pitchFamily="34" charset="-122"/>
+                <a:cs typeface="Aptos" pitchFamily="34" charset="-120"/>
+              </a:rPr>
+              <a:t>• Great for team photos or context visuals</a:t>
+            </a:r>
+            <a:endParaRPr lang="en-US" sz="1540" dirty="0"/>
+          </a:p>
+          <a:p>
+            <a:pPr indent="0" marL="0">
+              <a:buNone/>
+            </a:pPr>
+            <a:r>
+              <a:rPr lang="en-US" sz="1540" dirty="0">
+                <a:solidFill>
+                  <a:srgbClr val="172033"/>
+                </a:solidFill>
+                <a:latin typeface="Aptos" pitchFamily="34" charset="0"/>
+                <a:ea typeface="Aptos" pitchFamily="34" charset="-122"/>
+                <a:cs typeface="Aptos" pitchFamily="34" charset="-120"/>
+              </a:rPr>
+              <a:t>• Maintains brand accent bar on left edge</a:t>
+            </a:r>
+            <a:endParaRPr lang="en-US" sz="1540" dirty="0"/>
+          </a:p>
+          <a:p>
+            <a:pPr indent="0" marL="0">
+              <a:buNone/>
+            </a:pPr>
+            <a:r>
+              <a:rPr lang="en-US" sz="1540" dirty="0">
+                <a:solidFill>
+                  <a:srgbClr val="172033"/>
+                </a:solidFill>
+                <a:latin typeface="Aptos" pitchFamily="34" charset="0"/>
+                <a:ea typeface="Aptos" pitchFamily="34" charset="-122"/>
+                <a:cs typeface="Aptos" pitchFamily="34" charset="-120"/>
+              </a:rPr>
+              <a:t>• Auto-crops to fill right panel</a:t>
+            </a:r>
+            <a:endParaRPr lang="en-US" sz="1540" dirty="0"/>
+          </a:p>
+        </p:txBody>
+      </p:sp>
+    </p:spTree>
+  </p:cSld>
+  <p:clrMapOvr>
+    <a:masterClrMapping/>
+  </p:clrMapOvr>
+</p:sld>
+</file>
+
+<file path=ppt/slides/slide25.xml><?xml version="1.0" encoding="utf-8"?>
+<p:sld xmlns:a="http://schemas.openxmlformats.org/drawingml/2006/main" xmlns:r="http://schemas.openxmlformats.org/officeDocument/2006/relationships" xmlns:p="http://schemas.openxmlformats.org/presentationml/2006/main">
+  <p:cSld name="Slide 25">
+    <p:bg>
+      <p:bgPr>
+        <a:solidFill>
+          <a:srgbClr val="172033"/>
+        </a:solidFill>
+      </p:bgPr>
+    </p:bg>
+    <p:spTree>
+      <p:nvGrpSpPr>
+        <p:cNvPr id="1" name=""/>
+        <p:cNvGrpSpPr/>
+        <p:nvPr/>
+      </p:nvGrpSpPr>
+      <p:grpSpPr>
+        <a:xfrm>
+          <a:off x="0" y="0"/>
+          <a:ext cx="0" cy="0"/>
+          <a:chOff x="0" y="0"/>
+          <a:chExt cx="0" cy="0"/>
+        </a:xfrm>
+      </p:grpSpPr>
+      <p:pic>
+        <p:nvPicPr>
+          <p:cNvPr id="2" name="Image 0" descr="/home/runner/work/headless-slide-builder-js/headless-slide-builder-js/assets/images/test-hero.png">    </p:cNvPr>
+          <p:cNvPicPr>
+            <a:picLocks noChangeAspect="1"/>
+          </p:cNvPicPr>
+          <p:nvPr/>
+        </p:nvPicPr>
+        <p:blipFill>
+          <a:blip r:embed="rId1"/>
+          <a:srcRect l="1" r="1" t="0" b="0"/>
+          <a:stretch/>
+        </p:blipFill>
+        <p:spPr>
+          <a:xfrm>
+            <a:off x="0" y="0"/>
+            <a:ext cx="12191695" cy="6858000"/>
+          </a:xfrm>
+          <a:prstGeom prst="rect">
+            <a:avLst/>
+          </a:prstGeom>
+        </p:spPr>
+      </p:pic>
+      <p:sp>
+        <p:nvSpPr>
+          <p:cNvPr id="3" name="Shape 0"/>
+          <p:cNvSpPr/>
+          <p:nvPr/>
+        </p:nvSpPr>
+        <p:spPr>
+          <a:xfrm>
+            <a:off x="0" y="0"/>
+            <a:ext cx="12191695" cy="6858000"/>
+          </a:xfrm>
+          <a:prstGeom prst="rect">
+            <a:avLst/>
+          </a:prstGeom>
+          <a:solidFill>
+            <a:srgbClr val="172033">
+              <a:alpha val="62000"/>
+            </a:srgbClr>
+          </a:solidFill>
+          <a:ln w="12700">
+            <a:solidFill>
+              <a:srgbClr val="333333">
+                <a:alpha val="0"/>
+              </a:srgbClr>
+            </a:solidFill>
+            <a:prstDash val="solid"/>
+          </a:ln>
+        </p:spPr>
+      </p:sp>
+      <p:sp>
+        <p:nvSpPr>
+          <p:cNvPr id="4" name="Shape 1"/>
+          <p:cNvSpPr/>
+          <p:nvPr/>
+        </p:nvSpPr>
+        <p:spPr>
+          <a:xfrm>
+            <a:off x="0" y="0"/>
+            <a:ext cx="12191695" cy="6858000"/>
+          </a:xfrm>
+          <a:prstGeom prst="rect">
+            <a:avLst/>
+          </a:prstGeom>
+          <a:solidFill>
+            <a:srgbClr val="172033">
+              <a:alpha val="64000"/>
+            </a:srgbClr>
+          </a:solidFill>
+          <a:ln w="12700">
+            <a:solidFill>
+              <a:srgbClr val="333333">
+                <a:alpha val="0"/>
+              </a:srgbClr>
+            </a:solidFill>
+            <a:prstDash val="solid"/>
+          </a:ln>
+        </p:spPr>
+      </p:sp>
+      <p:sp>
+        <p:nvSpPr>
+          <p:cNvPr id="5" name="Text 2"/>
+          <p:cNvSpPr/>
+          <p:nvPr/>
+        </p:nvSpPr>
+        <p:spPr>
+          <a:xfrm>
+            <a:off x="713232" y="1024128"/>
+            <a:ext cx="5943600" cy="164592"/>
+          </a:xfrm>
+          <a:prstGeom prst="rect">
+            <a:avLst/>
+          </a:prstGeom>
+          <a:noFill/>
+          <a:ln/>
+        </p:spPr>
+        <p:txBody>
+          <a:bodyPr wrap="square" lIns="0" tIns="0" rIns="0" bIns="0" rtlCol="0" anchor="ctr">
+            <a:normAutofit/>
+          </a:bodyPr>
+          <a:lstStyle/>
+          <a:p>
+            <a:pPr indent="0" marL="0">
+              <a:buNone/>
+            </a:pPr>
+            <a:r>
+              <a:rPr lang="en-US" sz="820" b="1" dirty="0">
+                <a:solidFill>
+                  <a:srgbClr val="F2B366"/>
+                </a:solidFill>
+                <a:latin typeface="Aptos" pitchFamily="34" charset="0"/>
+                <a:ea typeface="Aptos" pitchFamily="34" charset="-122"/>
+                <a:cs typeface="Aptos" pitchFamily="34" charset="-120"/>
+              </a:rPr>
+              <a:t>LAYOUT: FULL_BLEED</a:t>
+            </a:r>
+            <a:endParaRPr lang="en-US" sz="820" dirty="0"/>
+          </a:p>
+        </p:txBody>
+      </p:sp>
+      <p:sp>
+        <p:nvSpPr>
+          <p:cNvPr id="6" name="Text 3"/>
+          <p:cNvSpPr/>
+          <p:nvPr/>
+        </p:nvSpPr>
+        <p:spPr>
+          <a:xfrm>
+            <a:off x="713232" y="1417320"/>
+            <a:ext cx="6583680" cy="1097280"/>
+          </a:xfrm>
+          <a:prstGeom prst="rect">
+            <a:avLst/>
+          </a:prstGeom>
+          <a:noFill/>
+          <a:ln/>
+        </p:spPr>
+        <p:txBody>
+          <a:bodyPr wrap="square" lIns="0" tIns="0" rIns="0" bIns="0" rtlCol="0" anchor="ctr">
+            <a:normAutofit/>
+          </a:bodyPr>
+          <a:lstStyle/>
+          <a:p>
+            <a:pPr indent="0" marL="0">
+              <a:buNone/>
+            </a:pPr>
+            <a:r>
+              <a:rPr lang="en-US" sz="3500" b="1" dirty="0">
+                <a:solidFill>
+                  <a:srgbClr val="FFFFFF"/>
+                </a:solidFill>
+                <a:latin typeface="Aptos Display" pitchFamily="34" charset="0"/>
+                <a:ea typeface="Aptos Display" pitchFamily="34" charset="-122"/>
+                <a:cs typeface="Aptos Display" pitchFamily="34" charset="-120"/>
+              </a:rPr>
+              <a:t>Full Bleed Image</a:t>
+            </a:r>
+            <a:endParaRPr lang="en-US" sz="3500" dirty="0"/>
+          </a:p>
+        </p:txBody>
+      </p:sp>
+      <p:sp>
+        <p:nvSpPr>
+          <p:cNvPr id="7" name="Shape 4"/>
+          <p:cNvSpPr/>
+          <p:nvPr/>
+        </p:nvSpPr>
+        <p:spPr>
+          <a:xfrm>
+            <a:off x="658368" y="6382512"/>
+            <a:ext cx="10874959" cy="0"/>
+          </a:xfrm>
+          <a:prstGeom prst="line">
+            <a:avLst/>
+          </a:prstGeom>
+          <a:noFill/>
+          <a:ln w="6985">
+            <a:solidFill>
+              <a:srgbClr val="DDE6F0">
+                <a:alpha val="90000"/>
+              </a:srgbClr>
+            </a:solidFill>
+            <a:prstDash val="solid"/>
+          </a:ln>
+        </p:spPr>
+      </p:sp>
+      <p:sp>
+        <p:nvSpPr>
+          <p:cNvPr id="8" name="Text 5"/>
+          <p:cNvSpPr/>
+          <p:nvPr/>
+        </p:nvSpPr>
+        <p:spPr>
+          <a:xfrm>
+            <a:off x="658368" y="6537960"/>
+            <a:ext cx="6172200" cy="146304"/>
+          </a:xfrm>
+          <a:prstGeom prst="rect">
+            <a:avLst/>
+          </a:prstGeom>
+          <a:noFill/>
+          <a:ln/>
+        </p:spPr>
+        <p:txBody>
+          <a:bodyPr wrap="square" lIns="0" tIns="0" rIns="0" bIns="0" rtlCol="0" anchor="ctr"/>
+          <a:lstStyle/>
+          <a:p>
+            <a:pPr indent="0" marL="0">
+              <a:buNone/>
+            </a:pPr>
+            <a:r>
+              <a:rPr lang="en-US" sz="750" dirty="0">
+                <a:solidFill>
+                  <a:srgbClr val="667085"/>
+                </a:solidFill>
+                <a:latin typeface="Aptos" pitchFamily="34" charset="0"/>
+                <a:ea typeface="Aptos" pitchFamily="34" charset="-122"/>
+                <a:cs typeface="Aptos" pitchFamily="34" charset="-120"/>
+              </a:rPr>
+              <a:t>Headless Slide Builder Demo</a:t>
+            </a:r>
+            <a:endParaRPr lang="en-US" sz="750" dirty="0"/>
+          </a:p>
+        </p:txBody>
+      </p:sp>
+      <p:sp>
+        <p:nvSpPr>
+          <p:cNvPr id="9" name="Text 6"/>
+          <p:cNvSpPr/>
+          <p:nvPr/>
+        </p:nvSpPr>
+        <p:spPr>
+          <a:xfrm>
+            <a:off x="10509199" y="6537960"/>
+            <a:ext cx="502920" cy="146304"/>
+          </a:xfrm>
+          <a:prstGeom prst="rect">
+            <a:avLst/>
+          </a:prstGeom>
+          <a:noFill/>
+          <a:ln/>
+        </p:spPr>
+        <p:txBody>
+          <a:bodyPr wrap="square" lIns="0" tIns="0" rIns="0" bIns="0" rtlCol="0" anchor="ctr"/>
+          <a:lstStyle/>
+          <a:p>
+            <a:pPr algn="r" indent="0" marL="0">
+              <a:buNone/>
+            </a:pPr>
+            <a:r>
+              <a:rPr lang="en-US" sz="750" b="1" dirty="0">
+                <a:solidFill>
+                  <a:srgbClr val="1F4E79"/>
+                </a:solidFill>
+                <a:latin typeface="Aptos" pitchFamily="34" charset="0"/>
+                <a:ea typeface="Aptos" pitchFamily="34" charset="-122"/>
+                <a:cs typeface="Aptos" pitchFamily="34" charset="-120"/>
+              </a:rPr>
+              <a:t>25</a:t>
+            </a:r>
+            <a:endParaRPr lang="en-US" sz="750" dirty="0"/>
+          </a:p>
+        </p:txBody>
+      </p:sp>
+    </p:spTree>
+  </p:cSld>
+  <p:clrMapOvr>
+    <a:masterClrMapping/>
+  </p:clrMapOvr>
+</p:sld>
+</file>
+
+<file path=ppt/slides/slide26.xml><?xml version="1.0" encoding="utf-8"?>
+<p:sld xmlns:a="http://schemas.openxmlformats.org/drawingml/2006/main" xmlns:r="http://schemas.openxmlformats.org/officeDocument/2006/relationships" xmlns:p="http://schemas.openxmlformats.org/presentationml/2006/main">
+  <p:cSld name="Slide 26">
+    <p:bg>
+      <p:bgPr>
+        <a:solidFill>
+          <a:srgbClr val="F6F8FB"/>
+        </a:solidFill>
+      </p:bgPr>
+    </p:bg>
+    <p:spTree>
+      <p:nvGrpSpPr>
+        <p:cNvPr id="1" name=""/>
+        <p:cNvGrpSpPr/>
+        <p:nvPr/>
+      </p:nvGrpSpPr>
+      <p:grpSpPr>
+        <a:xfrm>
+          <a:off x="0" y="0"/>
+          <a:ext cx="0" cy="0"/>
+          <a:chOff x="0" y="0"/>
+          <a:chExt cx="0" cy="0"/>
+        </a:xfrm>
+      </p:grpSpPr>
+      <p:sp>
+        <p:nvSpPr>
+          <p:cNvPr id="2" name="Shape 0"/>
+          <p:cNvSpPr/>
+          <p:nvPr/>
+        </p:nvSpPr>
+        <p:spPr>
+          <a:xfrm>
+            <a:off x="9921240" y="-914400"/>
+            <a:ext cx="2926080" cy="2926080"/>
+          </a:xfrm>
+          <a:prstGeom prst="arc">
+            <a:avLst/>
+          </a:prstGeom>
+          <a:solidFill>
+            <a:srgbClr val="4F8FCF">
+              <a:alpha val="10000"/>
+            </a:srgbClr>
+          </a:solidFill>
+          <a:ln w="12700">
+            <a:solidFill>
+              <a:srgbClr val="4F8FCF">
+                <a:alpha val="0"/>
+              </a:srgbClr>
+            </a:solidFill>
+            <a:prstDash val="solid"/>
+          </a:ln>
+        </p:spPr>
+      </p:sp>
+      <p:sp>
+        <p:nvSpPr>
+          <p:cNvPr id="3" name="Shape 1"/>
+          <p:cNvSpPr/>
+          <p:nvPr/>
+        </p:nvSpPr>
+        <p:spPr>
+          <a:xfrm>
+            <a:off x="-1051560" y="5394960"/>
+            <a:ext cx="2148840" cy="2148840"/>
+          </a:xfrm>
+          <a:prstGeom prst="arc">
+            <a:avLst/>
+          </a:prstGeom>
+          <a:solidFill>
+            <a:srgbClr val="F2B366">
+              <a:alpha val="9000"/>
+            </a:srgbClr>
+          </a:solidFill>
+          <a:ln w="12700">
+            <a:solidFill>
+              <a:srgbClr val="F2B366">
+                <a:alpha val="0"/>
+              </a:srgbClr>
+            </a:solidFill>
+            <a:prstDash val="solid"/>
+          </a:ln>
+        </p:spPr>
+      </p:sp>
+      <p:sp>
+        <p:nvSpPr>
+          <p:cNvPr id="4" name="Shape 2"/>
+          <p:cNvSpPr/>
+          <p:nvPr/>
+        </p:nvSpPr>
+        <p:spPr>
+          <a:xfrm>
+            <a:off x="0" y="0"/>
+            <a:ext cx="12191695" cy="68580"/>
+          </a:xfrm>
+          <a:prstGeom prst="rect">
+            <a:avLst/>
+          </a:prstGeom>
+          <a:solidFill>
+            <a:srgbClr val="1F4E79"/>
+          </a:solidFill>
+          <a:ln w="12700">
+            <a:solidFill>
+              <a:srgbClr val="1F4E79">
+                <a:alpha val="0"/>
+              </a:srgbClr>
+            </a:solidFill>
+            <a:prstDash val="solid"/>
+          </a:ln>
+        </p:spPr>
+      </p:sp>
+      <p:sp>
+        <p:nvSpPr>
+          <p:cNvPr id="5" name="Shape 3"/>
+          <p:cNvSpPr/>
+          <p:nvPr/>
+        </p:nvSpPr>
+        <p:spPr>
+          <a:xfrm>
+            <a:off x="658368" y="6382512"/>
+            <a:ext cx="10874959" cy="0"/>
+          </a:xfrm>
+          <a:prstGeom prst="line">
+            <a:avLst/>
+          </a:prstGeom>
+          <a:noFill/>
+          <a:ln w="6985">
+            <a:solidFill>
+              <a:srgbClr val="DDE6F0">
+                <a:alpha val="90000"/>
+              </a:srgbClr>
+            </a:solidFill>
+            <a:prstDash val="solid"/>
+          </a:ln>
+        </p:spPr>
+      </p:sp>
+      <p:sp>
+        <p:nvSpPr>
+          <p:cNvPr id="6" name="Text 4"/>
+          <p:cNvSpPr/>
+          <p:nvPr/>
+        </p:nvSpPr>
+        <p:spPr>
+          <a:xfrm>
+            <a:off x="658368" y="6537960"/>
+            <a:ext cx="6172200" cy="146304"/>
+          </a:xfrm>
+          <a:prstGeom prst="rect">
+            <a:avLst/>
+          </a:prstGeom>
+          <a:noFill/>
+          <a:ln/>
+        </p:spPr>
+        <p:txBody>
+          <a:bodyPr wrap="square" lIns="0" tIns="0" rIns="0" bIns="0" rtlCol="0" anchor="ctr"/>
+          <a:lstStyle/>
+          <a:p>
+            <a:pPr indent="0" marL="0">
+              <a:buNone/>
+            </a:pPr>
+            <a:r>
+              <a:rPr lang="en-US" sz="750" dirty="0">
+                <a:solidFill>
+                  <a:srgbClr val="667085"/>
+                </a:solidFill>
+                <a:latin typeface="Aptos" pitchFamily="34" charset="0"/>
+                <a:ea typeface="Aptos" pitchFamily="34" charset="-122"/>
+                <a:cs typeface="Aptos" pitchFamily="34" charset="-120"/>
+              </a:rPr>
+              <a:t>Headless Slide Builder Demo</a:t>
+            </a:r>
+            <a:endParaRPr lang="en-US" sz="750" dirty="0"/>
+          </a:p>
+        </p:txBody>
+      </p:sp>
+      <p:sp>
+        <p:nvSpPr>
+          <p:cNvPr id="7" name="Text 5"/>
+          <p:cNvSpPr/>
+          <p:nvPr/>
+        </p:nvSpPr>
+        <p:spPr>
+          <a:xfrm>
+            <a:off x="10509199" y="6537960"/>
+            <a:ext cx="502920" cy="146304"/>
+          </a:xfrm>
+          <a:prstGeom prst="rect">
+            <a:avLst/>
+          </a:prstGeom>
+          <a:noFill/>
+          <a:ln/>
+        </p:spPr>
+        <p:txBody>
+          <a:bodyPr wrap="square" lIns="0" tIns="0" rIns="0" bIns="0" rtlCol="0" anchor="ctr"/>
+          <a:lstStyle/>
+          <a:p>
+            <a:pPr algn="r" indent="0" marL="0">
+              <a:buNone/>
+            </a:pPr>
+            <a:r>
+              <a:rPr lang="en-US" sz="750" b="1" dirty="0">
+                <a:solidFill>
+                  <a:srgbClr val="1F4E79"/>
+                </a:solidFill>
+                <a:latin typeface="Aptos" pitchFamily="34" charset="0"/>
+                <a:ea typeface="Aptos" pitchFamily="34" charset="-122"/>
+                <a:cs typeface="Aptos" pitchFamily="34" charset="-120"/>
+              </a:rPr>
+              <a:t>26</a:t>
+            </a:r>
+            <a:endParaRPr lang="en-US" sz="750" dirty="0"/>
+          </a:p>
+        </p:txBody>
+      </p:sp>
+      <p:sp>
+        <p:nvSpPr>
+          <p:cNvPr id="8" name="Text 6"/>
+          <p:cNvSpPr/>
+          <p:nvPr/>
+        </p:nvSpPr>
+        <p:spPr>
+          <a:xfrm>
+            <a:off x="658368" y="256032"/>
+            <a:ext cx="5486400" cy="164592"/>
+          </a:xfrm>
+          <a:prstGeom prst="rect">
+            <a:avLst/>
+          </a:prstGeom>
+          <a:noFill/>
+          <a:ln/>
+        </p:spPr>
+        <p:txBody>
+          <a:bodyPr wrap="square" lIns="0" tIns="0" rIns="0" bIns="0" rtlCol="0" anchor="ctr">
+            <a:normAutofit/>
+          </a:bodyPr>
+          <a:lstStyle/>
+          <a:p>
+            <a:pPr indent="0" marL="0">
+              <a:buNone/>
+            </a:pPr>
+            <a:r>
+              <a:rPr lang="en-US" sz="820" b="1" dirty="0">
+                <a:solidFill>
+                  <a:srgbClr val="4F8FCF"/>
+                </a:solidFill>
+                <a:latin typeface="Aptos" pitchFamily="34" charset="0"/>
+                <a:ea typeface="Aptos" pitchFamily="34" charset="-122"/>
+                <a:cs typeface="Aptos" pitchFamily="34" charset="-120"/>
+              </a:rPr>
+              <a:t>LAYOUT: IMAGE_GRID</a:t>
+            </a:r>
+            <a:endParaRPr lang="en-US" sz="820" dirty="0"/>
+          </a:p>
+        </p:txBody>
+      </p:sp>
+      <p:sp>
+        <p:nvSpPr>
+          <p:cNvPr id="9" name="Text 7"/>
+          <p:cNvSpPr/>
+          <p:nvPr/>
+        </p:nvSpPr>
+        <p:spPr>
+          <a:xfrm>
+            <a:off x="658368" y="512064"/>
+            <a:ext cx="10874959" cy="502920"/>
+          </a:xfrm>
+          <a:prstGeom prst="rect">
+            <a:avLst/>
+          </a:prstGeom>
+          <a:noFill/>
+          <a:ln/>
+        </p:spPr>
+        <p:txBody>
+          <a:bodyPr wrap="square" lIns="0" tIns="0" rIns="0" bIns="0" rtlCol="0" anchor="ctr">
+            <a:normAutofit/>
+          </a:bodyPr>
+          <a:lstStyle/>
+          <a:p>
+            <a:pPr indent="0" marL="0">
+              <a:buNone/>
+            </a:pPr>
+            <a:r>
+              <a:rPr lang="en-US" sz="3100" b="1" dirty="0">
+                <a:solidFill>
+                  <a:srgbClr val="172033"/>
+                </a:solidFill>
+                <a:latin typeface="Aptos Display" pitchFamily="34" charset="0"/>
+                <a:ea typeface="Aptos Display" pitchFamily="34" charset="-122"/>
+                <a:cs typeface="Aptos Display" pitchFamily="34" charset="-120"/>
+              </a:rPr>
+              <a:t>Image Grid</a:t>
+            </a:r>
+            <a:endParaRPr lang="en-US" sz="3100" dirty="0"/>
+          </a:p>
+        </p:txBody>
+      </p:sp>
+      <p:sp>
+        <p:nvSpPr>
+          <p:cNvPr id="10" name="Shape 8"/>
+          <p:cNvSpPr/>
+          <p:nvPr/>
+        </p:nvSpPr>
+        <p:spPr>
+          <a:xfrm>
+            <a:off x="658368" y="1120140"/>
+            <a:ext cx="676656" cy="39319"/>
+          </a:xfrm>
+          <a:prstGeom prst="rect">
+            <a:avLst/>
+          </a:prstGeom>
+          <a:solidFill>
+            <a:srgbClr val="F2B366"/>
+          </a:solidFill>
+          <a:ln w="12700">
+            <a:solidFill>
+              <a:srgbClr val="F2B366">
+                <a:alpha val="0"/>
+              </a:srgbClr>
+            </a:solidFill>
+            <a:prstDash val="solid"/>
+          </a:ln>
+        </p:spPr>
+      </p:sp>
+      <p:sp>
+        <p:nvSpPr>
+          <p:cNvPr id="11" name="Shape 9"/>
+          <p:cNvSpPr/>
+          <p:nvPr/>
+        </p:nvSpPr>
+        <p:spPr>
+          <a:xfrm>
+            <a:off x="658368" y="1417320"/>
+            <a:ext cx="5303520" cy="1901952"/>
+          </a:xfrm>
+          <a:prstGeom prst="roundRect">
+            <a:avLst>
+              <a:gd name="adj" fmla="val 7692"/>
+            </a:avLst>
+          </a:prstGeom>
+          <a:solidFill>
+            <a:srgbClr val="FFFFFF"/>
+          </a:solidFill>
+          <a:ln w="8890">
+            <a:solidFill>
+              <a:srgbClr val="DDE6F0"/>
+            </a:solidFill>
+            <a:prstDash val="solid"/>
+          </a:ln>
+          <a:effectLst>
+            <a:outerShdw sx="100000" sy="100000" kx="0" ky="0" algn="bl" rotWithShape="0" blurRad="13970" dist="50800" dir="2700000">
+              <a:srgbClr val="C9D3DF">
+                <a:alpha val="13000"/>
+              </a:srgbClr>
+            </a:outerShdw>
+          </a:effectLst>
+        </p:spPr>
+      </p:sp>
+      <p:pic>
+        <p:nvPicPr>
+          <p:cNvPr id="12" name="Image 0" descr="/home/runner/work/headless-slide-builder-js/headless-slide-builder-js/assets/images/test-hero.png">    </p:cNvPr>
+          <p:cNvPicPr>
+            <a:picLocks noChangeAspect="1"/>
+          </p:cNvPicPr>
+          <p:nvPr/>
+        </p:nvPicPr>
+        <p:blipFill>
+          <a:blip r:embed="rId1"/>
+          <a:srcRect l="0" r="0" t="18519" b="18519"/>
+          <a:stretch/>
+        </p:blipFill>
+        <p:spPr>
+          <a:xfrm>
+            <a:off x="676656" y="1435608"/>
+            <a:ext cx="5266944" cy="1865376"/>
+          </a:xfrm>
+          <a:prstGeom prst="rect">
+            <a:avLst/>
+          </a:prstGeom>
+        </p:spPr>
+      </p:pic>
+      <p:sp>
+        <p:nvSpPr>
+          <p:cNvPr id="13" name="Shape 10"/>
+          <p:cNvSpPr/>
+          <p:nvPr/>
+        </p:nvSpPr>
+        <p:spPr>
+          <a:xfrm>
+            <a:off x="6236208" y="1417320"/>
+            <a:ext cx="5303520" cy="1901952"/>
+          </a:xfrm>
+          <a:prstGeom prst="roundRect">
+            <a:avLst>
+              <a:gd name="adj" fmla="val 7692"/>
+            </a:avLst>
+          </a:prstGeom>
+          <a:solidFill>
+            <a:srgbClr val="FFFFFF"/>
+          </a:solidFill>
+          <a:ln w="8890">
+            <a:solidFill>
+              <a:srgbClr val="DDE6F0"/>
+            </a:solidFill>
+            <a:prstDash val="solid"/>
+          </a:ln>
+          <a:effectLst>
+            <a:outerShdw sx="100000" sy="100000" kx="0" ky="0" algn="bl" rotWithShape="0" blurRad="13970" dist="50800" dir="2700000">
+              <a:srgbClr val="C9D3DF">
+                <a:alpha val="13000"/>
+              </a:srgbClr>
+            </a:outerShdw>
+          </a:effectLst>
+        </p:spPr>
+      </p:sp>
+      <p:pic>
+        <p:nvPicPr>
+          <p:cNvPr id="14" name="Image 1" descr="/home/runner/work/headless-slide-builder-js/headless-slide-builder-js/assets/images/test-meeting.png">    </p:cNvPr>
+          <p:cNvPicPr>
+            <a:picLocks noChangeAspect="1"/>
+          </p:cNvPicPr>
+          <p:nvPr/>
+        </p:nvPicPr>
+        <p:blipFill>
+          <a:blip r:embed="rId2"/>
+          <a:srcRect l="0" r="0" t="18519" b="18519"/>
+          <a:stretch/>
+        </p:blipFill>
+        <p:spPr>
+          <a:xfrm>
+            <a:off x="6254496" y="1435608"/>
+            <a:ext cx="5266944" cy="1865376"/>
+          </a:xfrm>
+          <a:prstGeom prst="rect">
+            <a:avLst/>
+          </a:prstGeom>
+        </p:spPr>
+      </p:pic>
+      <p:sp>
+        <p:nvSpPr>
+          <p:cNvPr id="15" name="Shape 11"/>
+          <p:cNvSpPr/>
+          <p:nvPr/>
+        </p:nvSpPr>
+        <p:spPr>
+          <a:xfrm>
+            <a:off x="658368" y="3584448"/>
+            <a:ext cx="5303520" cy="1901952"/>
+          </a:xfrm>
+          <a:prstGeom prst="roundRect">
+            <a:avLst>
+              <a:gd name="adj" fmla="val 7692"/>
+            </a:avLst>
+          </a:prstGeom>
+          <a:solidFill>
+            <a:srgbClr val="FFFFFF"/>
+          </a:solidFill>
+          <a:ln w="8890">
+            <a:solidFill>
+              <a:srgbClr val="DDE6F0"/>
+            </a:solidFill>
+            <a:prstDash val="solid"/>
+          </a:ln>
+          <a:effectLst>
+            <a:outerShdw sx="100000" sy="100000" kx="0" ky="0" algn="bl" rotWithShape="0" blurRad="13970" dist="50800" dir="2700000">
+              <a:srgbClr val="C9D3DF">
+                <a:alpha val="13000"/>
+              </a:srgbClr>
+            </a:outerShdw>
+          </a:effectLst>
+        </p:spPr>
+      </p:sp>
+      <p:pic>
+        <p:nvPicPr>
+          <p:cNvPr id="16" name="Image 2" descr="/home/runner/work/headless-slide-builder-js/headless-slide-builder-js/assets/images/test-workspace.png">    </p:cNvPr>
+          <p:cNvPicPr>
+            <a:picLocks noChangeAspect="1"/>
+          </p:cNvPicPr>
+          <p:nvPr/>
+        </p:nvPicPr>
+        <p:blipFill>
+          <a:blip r:embed="rId3"/>
+          <a:srcRect l="0" r="0" t="18519" b="18519"/>
+          <a:stretch/>
+        </p:blipFill>
+        <p:spPr>
+          <a:xfrm>
+            <a:off x="676656" y="3602736"/>
+            <a:ext cx="5266944" cy="1865376"/>
+          </a:xfrm>
+          <a:prstGeom prst="rect">
+            <a:avLst/>
+          </a:prstGeom>
+        </p:spPr>
+      </p:pic>
+      <p:sp>
+        <p:nvSpPr>
+          <p:cNvPr id="17" name="Shape 12"/>
+          <p:cNvSpPr/>
+          <p:nvPr/>
+        </p:nvSpPr>
+        <p:spPr>
+          <a:xfrm>
+            <a:off x="6236208" y="3584448"/>
+            <a:ext cx="5303520" cy="1901952"/>
+          </a:xfrm>
+          <a:prstGeom prst="roundRect">
+            <a:avLst>
+              <a:gd name="adj" fmla="val 7692"/>
+            </a:avLst>
+          </a:prstGeom>
+          <a:solidFill>
+            <a:srgbClr val="FFFFFF"/>
+          </a:solidFill>
+          <a:ln w="8890">
+            <a:solidFill>
+              <a:srgbClr val="DDE6F0"/>
+            </a:solidFill>
+            <a:prstDash val="solid"/>
+          </a:ln>
+          <a:effectLst>
+            <a:outerShdw sx="100000" sy="100000" kx="0" ky="0" algn="bl" rotWithShape="0" blurRad="13970" dist="50800" dir="2700000">
+              <a:srgbClr val="C9D3DF">
+                <a:alpha val="13000"/>
+              </a:srgbClr>
+            </a:outerShdw>
+          </a:effectLst>
+        </p:spPr>
+      </p:sp>
+      <p:pic>
+        <p:nvPicPr>
+          <p:cNvPr id="18" name="Image 3" descr="/home/runner/work/headless-slide-builder-js/headless-slide-builder-js/assets/images/test-data-flow.png">    </p:cNvPr>
+          <p:cNvPicPr>
+            <a:picLocks noChangeAspect="1"/>
+          </p:cNvPicPr>
+          <p:nvPr/>
+        </p:nvPicPr>
+        <p:blipFill>
+          <a:blip r:embed="rId4"/>
+          <a:srcRect l="0" r="0" t="18519" b="18519"/>
+          <a:stretch/>
+        </p:blipFill>
+        <p:spPr>
+          <a:xfrm>
+            <a:off x="6254496" y="3602736"/>
+            <a:ext cx="5266944" cy="1865376"/>
+          </a:xfrm>
+          <a:prstGeom prst="rect">
+            <a:avLst/>
+          </a:prstGeom>
+        </p:spPr>
+      </p:pic>
+    </p:spTree>
+  </p:cSld>
+  <p:clrMapOvr>
+    <a:masterClrMapping/>
+  </p:clrMapOvr>
+</p:sld>
+</file>
+
+<file path=ppt/slides/slide27.xml><?xml version="1.0" encoding="utf-8"?>
+<p:sld xmlns:a="http://schemas.openxmlformats.org/drawingml/2006/main" xmlns:r="http://schemas.openxmlformats.org/officeDocument/2006/relationships" xmlns:p="http://schemas.openxmlformats.org/presentationml/2006/main">
+  <p:cSld name="Slide 27">
+    <p:bg>
+      <p:bgPr>
+        <a:solidFill>
+          <a:srgbClr val="F6F8FB"/>
+        </a:solidFill>
+      </p:bgPr>
+    </p:bg>
+    <p:spTree>
+      <p:nvGrpSpPr>
+        <p:cNvPr id="1" name=""/>
+        <p:cNvGrpSpPr/>
+        <p:nvPr/>
+      </p:nvGrpSpPr>
+      <p:grpSpPr>
+        <a:xfrm>
+          <a:off x="0" y="0"/>
+          <a:ext cx="0" cy="0"/>
+          <a:chOff x="0" y="0"/>
+          <a:chExt cx="0" cy="0"/>
+        </a:xfrm>
+      </p:grpSpPr>
+      <p:sp>
+        <p:nvSpPr>
+          <p:cNvPr id="2" name="Shape 0"/>
+          <p:cNvSpPr/>
+          <p:nvPr/>
+        </p:nvSpPr>
+        <p:spPr>
+          <a:xfrm>
+            <a:off x="9921240" y="-914400"/>
+            <a:ext cx="2926080" cy="2926080"/>
+          </a:xfrm>
+          <a:prstGeom prst="arc">
+            <a:avLst/>
+          </a:prstGeom>
+          <a:solidFill>
+            <a:srgbClr val="4F8FCF">
+              <a:alpha val="10000"/>
+            </a:srgbClr>
+          </a:solidFill>
+          <a:ln w="12700">
+            <a:solidFill>
+              <a:srgbClr val="4F8FCF">
+                <a:alpha val="0"/>
+              </a:srgbClr>
+            </a:solidFill>
+            <a:prstDash val="solid"/>
+          </a:ln>
+        </p:spPr>
+      </p:sp>
+      <p:sp>
+        <p:nvSpPr>
+          <p:cNvPr id="3" name="Shape 1"/>
+          <p:cNvSpPr/>
+          <p:nvPr/>
+        </p:nvSpPr>
+        <p:spPr>
+          <a:xfrm>
+            <a:off x="-1051560" y="5394960"/>
+            <a:ext cx="2148840" cy="2148840"/>
+          </a:xfrm>
+          <a:prstGeom prst="arc">
+            <a:avLst/>
+          </a:prstGeom>
+          <a:solidFill>
+            <a:srgbClr val="F2B366">
+              <a:alpha val="9000"/>
+            </a:srgbClr>
+          </a:solidFill>
+          <a:ln w="12700">
+            <a:solidFill>
+              <a:srgbClr val="F2B366">
+                <a:alpha val="0"/>
+              </a:srgbClr>
+            </a:solidFill>
+            <a:prstDash val="solid"/>
+          </a:ln>
+        </p:spPr>
+      </p:sp>
+      <p:sp>
+        <p:nvSpPr>
+          <p:cNvPr id="4" name="Shape 2"/>
+          <p:cNvSpPr/>
+          <p:nvPr/>
+        </p:nvSpPr>
+        <p:spPr>
+          <a:xfrm>
+            <a:off x="0" y="0"/>
+            <a:ext cx="12191695" cy="68580"/>
+          </a:xfrm>
+          <a:prstGeom prst="rect">
+            <a:avLst/>
+          </a:prstGeom>
+          <a:solidFill>
+            <a:srgbClr val="1F4E79"/>
+          </a:solidFill>
+          <a:ln w="12700">
+            <a:solidFill>
+              <a:srgbClr val="1F4E79">
+                <a:alpha val="0"/>
+              </a:srgbClr>
+            </a:solidFill>
+            <a:prstDash val="solid"/>
+          </a:ln>
+        </p:spPr>
+      </p:sp>
+      <p:sp>
+        <p:nvSpPr>
+          <p:cNvPr id="5" name="Shape 3"/>
+          <p:cNvSpPr/>
+          <p:nvPr/>
+        </p:nvSpPr>
+        <p:spPr>
+          <a:xfrm>
+            <a:off x="658368" y="6382512"/>
+            <a:ext cx="10874959" cy="0"/>
+          </a:xfrm>
+          <a:prstGeom prst="line">
+            <a:avLst/>
+          </a:prstGeom>
+          <a:noFill/>
+          <a:ln w="6985">
+            <a:solidFill>
+              <a:srgbClr val="DDE6F0">
+                <a:alpha val="90000"/>
+              </a:srgbClr>
+            </a:solidFill>
+            <a:prstDash val="solid"/>
+          </a:ln>
+        </p:spPr>
+      </p:sp>
+      <p:sp>
+        <p:nvSpPr>
+          <p:cNvPr id="6" name="Text 4"/>
+          <p:cNvSpPr/>
+          <p:nvPr/>
+        </p:nvSpPr>
+        <p:spPr>
+          <a:xfrm>
+            <a:off x="658368" y="6537960"/>
+            <a:ext cx="6172200" cy="146304"/>
+          </a:xfrm>
+          <a:prstGeom prst="rect">
+            <a:avLst/>
+          </a:prstGeom>
+          <a:noFill/>
+          <a:ln/>
+        </p:spPr>
+        <p:txBody>
+          <a:bodyPr wrap="square" lIns="0" tIns="0" rIns="0" bIns="0" rtlCol="0" anchor="ctr"/>
+          <a:lstStyle/>
+          <a:p>
+            <a:pPr indent="0" marL="0">
+              <a:buNone/>
+            </a:pPr>
+            <a:r>
+              <a:rPr lang="en-US" sz="750" dirty="0">
+                <a:solidFill>
+                  <a:srgbClr val="667085"/>
+                </a:solidFill>
+                <a:latin typeface="Aptos" pitchFamily="34" charset="0"/>
+                <a:ea typeface="Aptos" pitchFamily="34" charset="-122"/>
+                <a:cs typeface="Aptos" pitchFamily="34" charset="-120"/>
+              </a:rPr>
+              <a:t>Headless Slide Builder Demo</a:t>
+            </a:r>
+            <a:endParaRPr lang="en-US" sz="750" dirty="0"/>
+          </a:p>
+        </p:txBody>
+      </p:sp>
+      <p:sp>
+        <p:nvSpPr>
+          <p:cNvPr id="7" name="Text 5"/>
+          <p:cNvSpPr/>
+          <p:nvPr/>
+        </p:nvSpPr>
+        <p:spPr>
+          <a:xfrm>
+            <a:off x="10509199" y="6537960"/>
+            <a:ext cx="502920" cy="146304"/>
+          </a:xfrm>
+          <a:prstGeom prst="rect">
+            <a:avLst/>
+          </a:prstGeom>
+          <a:noFill/>
+          <a:ln/>
+        </p:spPr>
+        <p:txBody>
+          <a:bodyPr wrap="square" lIns="0" tIns="0" rIns="0" bIns="0" rtlCol="0" anchor="ctr"/>
+          <a:lstStyle/>
+          <a:p>
+            <a:pPr algn="r" indent="0" marL="0">
+              <a:buNone/>
+            </a:pPr>
+            <a:r>
+              <a:rPr lang="en-US" sz="750" b="1" dirty="0">
+                <a:solidFill>
+                  <a:srgbClr val="1F4E79"/>
+                </a:solidFill>
+                <a:latin typeface="Aptos" pitchFamily="34" charset="0"/>
+                <a:ea typeface="Aptos" pitchFamily="34" charset="-122"/>
+                <a:cs typeface="Aptos" pitchFamily="34" charset="-120"/>
+              </a:rPr>
+              <a:t>27</a:t>
             </a:r>
             <a:endParaRPr lang="en-US" sz="750" dirty="0"/>
           </a:p>
